--- a/data_engineering_workshop.pptx
+++ b/data_engineering_workshop.pptx
@@ -31,6 +31,18 @@
     <p:sldId id="280" r:id="rId25"/>
     <p:sldId id="281" r:id="rId26"/>
     <p:sldId id="282" r:id="rId27"/>
+    <p:sldId id="283" r:id="rId28"/>
+    <p:sldId id="284" r:id="rId29"/>
+    <p:sldId id="285" r:id="rId30"/>
+    <p:sldId id="286" r:id="rId31"/>
+    <p:sldId id="290" r:id="rId32"/>
+    <p:sldId id="287" r:id="rId33"/>
+    <p:sldId id="288" r:id="rId34"/>
+    <p:sldId id="289" r:id="rId35"/>
+    <p:sldId id="291" r:id="rId36"/>
+    <p:sldId id="292" r:id="rId37"/>
+    <p:sldId id="293" r:id="rId38"/>
+    <p:sldId id="294" r:id="rId39"/>
   </p:sldIdLst>
   <p:sldSz cx="12192000" cy="6858000"/>
   <p:notesSz cx="6858000" cy="9144000"/>
@@ -305,7 +317,7 @@
           <a:p>
             <a:fld id="{567B50E4-2343-4B20-80BE-1605C97DFB16}" type="datetime1">
               <a:rPr lang="en-US" smtClean="0"/>
-              <a:t>4/2/26</a:t>
+              <a:t>4/11/26</a:t>
             </a:fld>
             <a:endParaRPr lang="en-US"/>
           </a:p>
@@ -602,7 +614,7 @@
           <a:p>
             <a:fld id="{CE6CA204-B091-40ED-8158-331EE628B522}" type="datetime1">
               <a:rPr lang="en-US" smtClean="0"/>
-              <a:t>4/2/26</a:t>
+              <a:t>4/11/26</a:t>
             </a:fld>
             <a:endParaRPr lang="en-US" dirty="0"/>
           </a:p>
@@ -840,7 +852,7 @@
           <a:p>
             <a:fld id="{23692F09-9D88-4105-92F6-7298804EAA90}" type="datetime1">
               <a:rPr lang="en-US" smtClean="0"/>
-              <a:t>4/2/26</a:t>
+              <a:t>4/11/26</a:t>
             </a:fld>
             <a:endParaRPr lang="en-US"/>
           </a:p>
@@ -1057,7 +1069,7 @@
           <a:p>
             <a:fld id="{33744F96-061D-4D71-97A2-2371A43FDE7C}" type="datetime1">
               <a:rPr lang="en-US" smtClean="0"/>
-              <a:t>4/2/26</a:t>
+              <a:t>4/11/26</a:t>
             </a:fld>
             <a:endParaRPr lang="en-US"/>
           </a:p>
@@ -1274,7 +1286,7 @@
           <a:p>
             <a:fld id="{4C5FE133-02A7-439F-9131-2680F754099D}" type="datetime1">
               <a:rPr lang="en-US" smtClean="0"/>
-              <a:t>4/2/26</a:t>
+              <a:t>4/11/26</a:t>
             </a:fld>
             <a:endParaRPr lang="en-US"/>
           </a:p>
@@ -1491,7 +1503,7 @@
           <a:p>
             <a:fld id="{D91BF7DD-C7D0-4333-B18D-CCAF5427F9DD}" type="datetime1">
               <a:rPr lang="en-US" smtClean="0"/>
-              <a:t>4/2/26</a:t>
+              <a:t>4/11/26</a:t>
             </a:fld>
             <a:endParaRPr lang="en-US"/>
           </a:p>
@@ -1708,7 +1720,7 @@
           <a:p>
             <a:fld id="{30415979-091A-4302-A385-56FC1CE52E32}" type="datetime1">
               <a:rPr lang="en-US" smtClean="0"/>
-              <a:t>4/2/26</a:t>
+              <a:t>4/11/26</a:t>
             </a:fld>
             <a:endParaRPr lang="en-US"/>
           </a:p>
@@ -1971,7 +1983,7 @@
           <a:p>
             <a:fld id="{7836D543-476D-434F-B209-1A114B2E3F04}" type="datetime1">
               <a:rPr lang="en-US" smtClean="0"/>
-              <a:t>4/2/26</a:t>
+              <a:t>4/11/26</a:t>
             </a:fld>
             <a:endParaRPr lang="en-US"/>
           </a:p>
@@ -2229,7 +2241,7 @@
           <a:p>
             <a:fld id="{83DD0F20-7689-42E6-8664-6AA00B79F132}" type="datetime1">
               <a:rPr lang="en-US" smtClean="0"/>
-              <a:t>4/2/26</a:t>
+              <a:t>4/11/26</a:t>
             </a:fld>
             <a:endParaRPr lang="en-US"/>
           </a:p>
@@ -2502,7 +2514,7 @@
           <a:p>
             <a:fld id="{30F2F577-5BDA-4749-9F3F-0D340DC0D6A8}" type="datetime1">
               <a:rPr lang="en-US" smtClean="0"/>
-              <a:t>4/2/26</a:t>
+              <a:t>4/11/26</a:t>
             </a:fld>
             <a:endParaRPr lang="en-US"/>
           </a:p>
@@ -2760,7 +2772,7 @@
           <a:p>
             <a:fld id="{AC9378AD-A6D7-4162-BB5C-47C49B2E145B}" type="datetime1">
               <a:rPr lang="en-US" smtClean="0"/>
-              <a:t>4/2/26</a:t>
+              <a:t>4/11/26</a:t>
             </a:fld>
             <a:endParaRPr lang="en-US"/>
           </a:p>
@@ -2971,7 +2983,7 @@
           <a:p>
             <a:fld id="{C02DE44A-7CD8-4860-9BDC-2BE4C911F6D0}" type="datetime1">
               <a:rPr lang="en-US" smtClean="0"/>
-              <a:t>4/2/26</a:t>
+              <a:t>4/11/26</a:t>
             </a:fld>
             <a:endParaRPr lang="en-US"/>
           </a:p>
@@ -3243,7 +3255,7 @@
           <a:p>
             <a:fld id="{C67B65D3-547A-48A8-9F1F-13ED0B55ACC6}" type="datetime1">
               <a:rPr lang="en-US" smtClean="0"/>
-              <a:t>4/2/26</a:t>
+              <a:t>4/11/26</a:t>
             </a:fld>
             <a:endParaRPr lang="en-US"/>
           </a:p>
@@ -3459,7 +3471,7 @@
           <a:p>
             <a:fld id="{76A7CFE7-E645-4439-AA6B-DA8CF856D63E}" type="datetime1">
               <a:rPr lang="en-US" smtClean="0"/>
-              <a:t>4/2/26</a:t>
+              <a:t>4/11/26</a:t>
             </a:fld>
             <a:endParaRPr lang="en-US"/>
           </a:p>
@@ -3811,7 +3823,7 @@
           <a:p>
             <a:fld id="{E8B2C0DB-994F-48B0-91F4-5F06C3B86E32}" type="datetime1">
               <a:rPr lang="en-US" smtClean="0"/>
-              <a:t>4/2/26</a:t>
+              <a:t>4/11/26</a:t>
             </a:fld>
             <a:endParaRPr lang="en-US"/>
           </a:p>
@@ -4031,7 +4043,7 @@
           <a:p>
             <a:fld id="{D3F6A089-BE3E-4BB0-98EE-FDF712FF3613}" type="datetime1">
               <a:rPr lang="en-US" smtClean="0"/>
-              <a:t>4/2/26</a:t>
+              <a:t>4/11/26</a:t>
             </a:fld>
             <a:endParaRPr lang="en-US"/>
           </a:p>
@@ -4376,7 +4388,7 @@
           <a:p>
             <a:fld id="{AC101298-AE91-4071-9C72-5A98117ABE14}" type="datetime1">
               <a:rPr lang="en-US" smtClean="0"/>
-              <a:t>4/2/26</a:t>
+              <a:t>4/11/26</a:t>
             </a:fld>
             <a:endParaRPr lang="en-US"/>
           </a:p>
@@ -4603,7 +4615,7 @@
           <a:p>
             <a:fld id="{EABE4333-790C-44CD-B503-F52418ED809A}" type="datetime1">
               <a:rPr lang="en-US" smtClean="0"/>
-              <a:t>4/2/26</a:t>
+              <a:t>4/11/26</a:t>
             </a:fld>
             <a:endParaRPr lang="en-US"/>
           </a:p>
@@ -4974,7 +4986,7 @@
           <a:p>
             <a:fld id="{D2397CCD-8E49-4379-8DCB-9F17CAEDFC10}" type="datetime1">
               <a:rPr lang="en-US" smtClean="0"/>
-              <a:t>4/2/26</a:t>
+              <a:t>4/11/26</a:t>
             </a:fld>
             <a:endParaRPr lang="en-US"/>
           </a:p>
@@ -5181,7 +5193,7 @@
           <a:p>
             <a:fld id="{AA6146F6-C62B-441B-BAD2-D550454B4D53}" type="datetime1">
               <a:rPr lang="en-US" smtClean="0"/>
-              <a:t>4/2/26</a:t>
+              <a:t>4/11/26</a:t>
             </a:fld>
             <a:endParaRPr lang="en-US"/>
           </a:p>
@@ -5473,7 +5485,7 @@
           <a:p>
             <a:fld id="{A0383A68-D563-4FD5-B11F-54F8D5F1E37F}" type="datetime1">
               <a:rPr lang="en-US" smtClean="0"/>
-              <a:t>4/2/26</a:t>
+              <a:t>4/11/26</a:t>
             </a:fld>
             <a:endParaRPr lang="en-US"/>
           </a:p>
@@ -5770,7 +5782,7 @@
           <a:p>
             <a:fld id="{3148FABB-02FF-476F-AB37-BDD0E354E780}" type="datetime1">
               <a:rPr lang="en-US" smtClean="0"/>
-              <a:t>4/2/26</a:t>
+              <a:t>4/11/26</a:t>
             </a:fld>
             <a:endParaRPr lang="en-US"/>
           </a:p>
@@ -6128,7 +6140,7 @@
           <a:p>
             <a:fld id="{E38EAEAF-D16E-446F-97F9-D23FB245CB45}" type="datetime1">
               <a:rPr lang="en-US" smtClean="0"/>
-              <a:t>4/2/26</a:t>
+              <a:t>4/11/26</a:t>
             </a:fld>
             <a:endParaRPr lang="en-US"/>
           </a:p>
@@ -6386,7 +6398,7 @@
           <a:p>
             <a:fld id="{BCA428D3-736A-4038-886C-8BF662AA2745}" type="datetime1">
               <a:rPr lang="en-US" smtClean="0"/>
-              <a:t>4/2/26</a:t>
+              <a:t>4/11/26</a:t>
             </a:fld>
             <a:endParaRPr lang="en-US"/>
           </a:p>
@@ -6650,7 +6662,7 @@
           <a:p>
             <a:fld id="{1ED1DDEB-9B85-4E99-8A3D-ABE66C6280C3}" type="datetime1">
               <a:rPr lang="en-US" smtClean="0"/>
-              <a:t>4/2/26</a:t>
+              <a:t>4/11/26</a:t>
             </a:fld>
             <a:endParaRPr lang="en-US"/>
           </a:p>
@@ -6914,7 +6926,7 @@
           <a:p>
             <a:fld id="{A7A65DCA-443F-4667-9ED1-418507CE45A8}" type="datetime1">
               <a:rPr lang="en-US" smtClean="0"/>
-              <a:t>4/2/26</a:t>
+              <a:t>4/11/26</a:t>
             </a:fld>
             <a:endParaRPr lang="en-US"/>
           </a:p>
@@ -7134,7 +7146,7 @@
           <a:p>
             <a:fld id="{8CA1557D-4816-44D0-B6EE-6CAC6E30B54D}" type="datetime1">
               <a:rPr lang="en-US" smtClean="0"/>
-              <a:t>4/2/26</a:t>
+              <a:t>4/11/26</a:t>
             </a:fld>
             <a:endParaRPr lang="en-US"/>
           </a:p>
@@ -7350,7 +7362,7 @@
           <a:p>
             <a:fld id="{651F872E-5ED2-46B0-83A4-0C1AF0E0D91C}" type="datetime1">
               <a:rPr lang="en-US" smtClean="0"/>
-              <a:t>4/2/26</a:t>
+              <a:t>4/11/26</a:t>
             </a:fld>
             <a:endParaRPr lang="en-US"/>
           </a:p>
@@ -7621,7 +7633,7 @@
           <a:p>
             <a:fld id="{C6218575-0C6E-47B4-936E-32183810D7BF}" type="datetime1">
               <a:rPr lang="en-US" smtClean="0"/>
-              <a:t>4/2/26</a:t>
+              <a:t>4/11/26</a:t>
             </a:fld>
             <a:endParaRPr lang="en-US"/>
           </a:p>
@@ -7770,7 +7782,7 @@
           <a:p>
             <a:fld id="{91C29FB5-1C86-423F-AEAA-2683840666C3}" type="datetime1">
               <a:rPr lang="en-US" smtClean="0"/>
-              <a:t>4/2/26</a:t>
+              <a:t>4/11/26</a:t>
             </a:fld>
             <a:endParaRPr lang="en-US"/>
           </a:p>
@@ -8020,7 +8032,7 @@
           <a:p>
             <a:fld id="{111CCB4E-88AF-46AC-B7C5-30308F179659}" type="datetime1">
               <a:rPr lang="en-US" smtClean="0"/>
-              <a:t>4/2/26</a:t>
+              <a:t>4/11/26</a:t>
             </a:fld>
             <a:endParaRPr lang="en-US"/>
           </a:p>
@@ -8270,7 +8282,7 @@
           <a:p>
             <a:fld id="{5BA915B6-CC2A-4462-A7E5-B3080DF8F97D}" type="datetime1">
               <a:rPr lang="en-US" smtClean="0"/>
-              <a:t>4/2/26</a:t>
+              <a:t>4/11/26</a:t>
             </a:fld>
             <a:endParaRPr lang="en-US"/>
           </a:p>
@@ -8585,7 +8597,7 @@
           <a:p>
             <a:fld id="{506188F7-A494-4EEB-A53D-2B97B1D4CD3C}" type="datetime1">
               <a:rPr lang="en-US" smtClean="0"/>
-              <a:t>4/2/26</a:t>
+              <a:t>4/11/26</a:t>
             </a:fld>
             <a:endParaRPr lang="en-US"/>
           </a:p>
@@ -8834,7 +8846,7 @@
           <a:p>
             <a:fld id="{782E7A21-5BA8-4C4C-9705-3A1EA342AD8A}" type="datetime1">
               <a:rPr lang="en-US" smtClean="0"/>
-              <a:t>4/2/26</a:t>
+              <a:t>4/11/26</a:t>
             </a:fld>
             <a:endParaRPr lang="en-US"/>
           </a:p>
@@ -9115,7 +9127,7 @@
           <a:p>
             <a:fld id="{9F406BC0-1562-42E5-89A2-925CA193C8A6}" type="datetime1">
               <a:rPr lang="en-US" smtClean="0"/>
-              <a:t>4/2/26</a:t>
+              <a:t>4/11/26</a:t>
             </a:fld>
             <a:endParaRPr lang="en-US"/>
           </a:p>
@@ -9329,7 +9341,7 @@
           <a:p>
             <a:fld id="{507F376A-778D-45CF-8340-DB03B2DA6A3E}" type="datetime1">
               <a:rPr lang="en-US" smtClean="0"/>
-              <a:t>4/2/26</a:t>
+              <a:t>4/11/26</a:t>
             </a:fld>
             <a:endParaRPr lang="en-US"/>
           </a:p>
@@ -9602,7 +9614,7 @@
           <a:p>
             <a:fld id="{8B9DFF5A-622E-43FE-9EE9-BAAB78AB2046}" type="datetime1">
               <a:rPr lang="en-US" smtClean="0"/>
-              <a:t>4/2/26</a:t>
+              <a:t>4/11/26</a:t>
             </a:fld>
             <a:endParaRPr lang="en-US"/>
           </a:p>
@@ -10027,7 +10039,7 @@
           <a:p>
             <a:fld id="{FF55C09E-FF30-4AA0-A227-171955622259}" type="datetime1">
               <a:rPr lang="en-US" smtClean="0"/>
-              <a:t>4/2/26</a:t>
+              <a:t>4/11/26</a:t>
             </a:fld>
             <a:endParaRPr lang="en-US"/>
           </a:p>
@@ -10171,7 +10183,7 @@
           <a:p>
             <a:fld id="{97B279FF-407B-4B41-9E69-DE66ED04A328}" type="datetime1">
               <a:rPr lang="en-US" smtClean="0"/>
-              <a:t>4/2/26</a:t>
+              <a:t>4/11/26</a:t>
             </a:fld>
             <a:endParaRPr lang="en-US"/>
           </a:p>
@@ -10287,7 +10299,7 @@
           <a:p>
             <a:fld id="{A803E812-757D-4139-AF81-227C72D4B544}" type="datetime1">
               <a:rPr lang="en-US" smtClean="0"/>
-              <a:t>4/2/26</a:t>
+              <a:t>4/11/26</a:t>
             </a:fld>
             <a:endParaRPr lang="en-US"/>
           </a:p>
@@ -10595,7 +10607,7 @@
           <a:p>
             <a:fld id="{07D6A7E1-C424-43A5-938A-12DEC0A1D59D}" type="datetime1">
               <a:rPr lang="en-US" smtClean="0"/>
-              <a:t>4/2/26</a:t>
+              <a:t>4/11/26</a:t>
             </a:fld>
             <a:endParaRPr lang="en-US"/>
           </a:p>
@@ -10902,7 +10914,7 @@
           <a:p>
             <a:fld id="{807C4FC2-B89B-4919-A96B-662A3584681C}" type="datetime1">
               <a:rPr lang="en-US" smtClean="0"/>
-              <a:t>4/2/26</a:t>
+              <a:t>4/11/26</a:t>
             </a:fld>
             <a:endParaRPr lang="en-US"/>
           </a:p>
@@ -11145,7 +11157,7 @@
           <a:p>
             <a:fld id="{7C24BE51-D660-433D-AABA-154BE028E64E}" type="datetime1">
               <a:rPr lang="en-US" smtClean="0"/>
-              <a:t>4/2/26</a:t>
+              <a:t>4/11/26</a:t>
             </a:fld>
             <a:endParaRPr lang="en-US"/>
           </a:p>
@@ -11390,7 +11402,7 @@
           <a:p>
             <a:fld id="{DB61F76E-6064-4431-B5C4-29A511725BCF}" type="datetime1">
               <a:rPr lang="en-US" smtClean="0"/>
-              <a:t>4/2/26</a:t>
+              <a:t>4/11/26</a:t>
             </a:fld>
             <a:endParaRPr lang="en-US"/>
           </a:p>
@@ -11587,7 +11599,7 @@
           <a:p>
             <a:fld id="{1CBE73BE-5F1F-40EF-8F67-E3F24D65884D}" type="datetime1">
               <a:rPr lang="en-US" smtClean="0"/>
-              <a:t>4/2/26</a:t>
+              <a:t>4/11/26</a:t>
             </a:fld>
             <a:endParaRPr lang="en-US"/>
           </a:p>
@@ -11784,7 +11796,7 @@
           <a:p>
             <a:fld id="{3C868EF1-668D-4AD0-8652-1F3B3622EDC2}" type="datetime1">
               <a:rPr lang="en-US" smtClean="0"/>
-              <a:t>4/2/26</a:t>
+              <a:t>4/11/26</a:t>
             </a:fld>
             <a:endParaRPr lang="en-US"/>
           </a:p>
@@ -12011,7 +12023,7 @@
           <a:p>
             <a:fld id="{1E95609F-9B5B-4E29-8DB1-457A85E01A27}" type="datetime1">
               <a:rPr lang="en-US" smtClean="0"/>
-              <a:t>4/2/26</a:t>
+              <a:t>4/11/26</a:t>
             </a:fld>
             <a:endParaRPr lang="en-US"/>
           </a:p>
@@ -12172,7 +12184,7 @@
           <a:p>
             <a:fld id="{16A0DE37-B9D6-425C-B79B-6C6DFFBD0DA2}" type="datetime1">
               <a:rPr lang="en-US" smtClean="0"/>
-              <a:t>4/2/26</a:t>
+              <a:t>4/11/26</a:t>
             </a:fld>
             <a:endParaRPr lang="en-US"/>
           </a:p>
@@ -12417,7 +12429,7 @@
           <a:p>
             <a:fld id="{1045B0EE-4023-4E3C-8875-10AA631453CF}" type="datetime1">
               <a:rPr lang="en-US" smtClean="0"/>
-              <a:t>4/2/26</a:t>
+              <a:t>4/11/26</a:t>
             </a:fld>
             <a:endParaRPr lang="en-US"/>
           </a:p>
@@ -12659,7 +12671,7 @@
           <a:p>
             <a:fld id="{5EE9E671-1C83-40F7-9D33-FE8AAC7F721F}" type="datetime1">
               <a:rPr lang="en-US" smtClean="0"/>
-              <a:t>4/2/26</a:t>
+              <a:t>4/11/26</a:t>
             </a:fld>
             <a:endParaRPr lang="en-US"/>
           </a:p>
@@ -16487,6 +16499,466 @@
 </p:sld>
 </file>
 
+<file path=ppt/slides/slide27.xml><?xml version="1.0" encoding="utf-8"?>
+<p:sld xmlns:a="http://schemas.openxmlformats.org/drawingml/2006/main" xmlns:r="http://schemas.openxmlformats.org/officeDocument/2006/relationships" xmlns:p="http://schemas.openxmlformats.org/presentationml/2006/main">
+  <p:cSld>
+    <p:spTree>
+      <p:nvGrpSpPr>
+        <p:cNvPr id="1" name=""/>
+        <p:cNvGrpSpPr/>
+        <p:nvPr/>
+      </p:nvGrpSpPr>
+      <p:grpSpPr>
+        <a:xfrm>
+          <a:off x="0" y="0"/>
+          <a:ext cx="0" cy="0"/>
+          <a:chOff x="0" y="0"/>
+          <a:chExt cx="0" cy="0"/>
+        </a:xfrm>
+      </p:grpSpPr>
+      <p:sp>
+        <p:nvSpPr>
+          <p:cNvPr id="2" name="Title 1">
+            <a:extLst>
+              <a:ext uri="{FF2B5EF4-FFF2-40B4-BE49-F238E27FC236}">
+                <a16:creationId xmlns:a16="http://schemas.microsoft.com/office/drawing/2014/main" id="{8494EEAF-A0F9-FD00-7106-CBBA83DAEE8C}"/>
+              </a:ext>
+            </a:extLst>
+          </p:cNvPr>
+          <p:cNvSpPr>
+            <a:spLocks noGrp="1"/>
+          </p:cNvSpPr>
+          <p:nvPr>
+            <p:ph type="title"/>
+          </p:nvPr>
+        </p:nvSpPr>
+        <p:spPr/>
+        <p:txBody>
+          <a:bodyPr/>
+          <a:lstStyle/>
+          <a:p>
+            <a:r>
+              <a:rPr lang="en-IN" dirty="0"/>
+              <a:t>Final Target</a:t>
+            </a:r>
+            <a:endParaRPr lang="en-US" dirty="0"/>
+          </a:p>
+        </p:txBody>
+      </p:sp>
+      <p:pic>
+        <p:nvPicPr>
+          <p:cNvPr id="1026" name="Picture 2" descr="Example 1: Queries against an Amazon S3 data lake - Big Data Analytics Options on AWS">
+            <a:extLst>
+              <a:ext uri="{FF2B5EF4-FFF2-40B4-BE49-F238E27FC236}">
+                <a16:creationId xmlns:a16="http://schemas.microsoft.com/office/drawing/2014/main" id="{EFC0F3AE-0F72-AB82-AE89-B590E40CAB4B}"/>
+              </a:ext>
+            </a:extLst>
+          </p:cNvPr>
+          <p:cNvPicPr>
+            <a:picLocks noGrp="1" noChangeAspect="1" noChangeArrowheads="1"/>
+          </p:cNvPicPr>
+          <p:nvPr>
+            <p:ph idx="1"/>
+          </p:nvPr>
+        </p:nvPicPr>
+        <p:blipFill>
+          <a:blip r:embed="rId2">
+            <a:extLst>
+              <a:ext uri="{28A0092B-C50C-407E-A947-70E740481C1C}">
+                <a14:useLocalDpi xmlns:a14="http://schemas.microsoft.com/office/drawing/2010/main" val="0"/>
+              </a:ext>
+            </a:extLst>
+          </a:blip>
+          <a:srcRect/>
+          <a:stretch>
+            <a:fillRect/>
+          </a:stretch>
+        </p:blipFill>
+        <p:spPr bwMode="auto">
+          <a:xfrm>
+            <a:off x="3145631" y="2780506"/>
+            <a:ext cx="5588000" cy="2463800"/>
+          </a:xfrm>
+          <a:prstGeom prst="rect">
+            <a:avLst/>
+          </a:prstGeom>
+          <a:noFill/>
+          <a:extLst>
+            <a:ext uri="{909E8E84-426E-40DD-AFC4-6F175D3DCCD1}">
+              <a14:hiddenFill xmlns:a14="http://schemas.microsoft.com/office/drawing/2010/main">
+                <a:solidFill>
+                  <a:srgbClr val="FFFFFF"/>
+                </a:solidFill>
+              </a14:hiddenFill>
+            </a:ext>
+          </a:extLst>
+        </p:spPr>
+      </p:pic>
+    </p:spTree>
+    <p:extLst>
+      <p:ext uri="{BB962C8B-B14F-4D97-AF65-F5344CB8AC3E}">
+        <p14:creationId xmlns:p14="http://schemas.microsoft.com/office/powerpoint/2010/main" val="855311670"/>
+      </p:ext>
+    </p:extLst>
+  </p:cSld>
+  <p:clrMapOvr>
+    <a:masterClrMapping/>
+  </p:clrMapOvr>
+</p:sld>
+</file>
+
+<file path=ppt/slides/slide28.xml><?xml version="1.0" encoding="utf-8"?>
+<p:sld xmlns:a="http://schemas.openxmlformats.org/drawingml/2006/main" xmlns:r="http://schemas.openxmlformats.org/officeDocument/2006/relationships" xmlns:p="http://schemas.openxmlformats.org/presentationml/2006/main">
+  <p:cSld>
+    <p:spTree>
+      <p:nvGrpSpPr>
+        <p:cNvPr id="1" name=""/>
+        <p:cNvGrpSpPr/>
+        <p:nvPr/>
+      </p:nvGrpSpPr>
+      <p:grpSpPr>
+        <a:xfrm>
+          <a:off x="0" y="0"/>
+          <a:ext cx="0" cy="0"/>
+          <a:chOff x="0" y="0"/>
+          <a:chExt cx="0" cy="0"/>
+        </a:xfrm>
+      </p:grpSpPr>
+      <p:sp>
+        <p:nvSpPr>
+          <p:cNvPr id="2" name="Title 1">
+            <a:extLst>
+              <a:ext uri="{FF2B5EF4-FFF2-40B4-BE49-F238E27FC236}">
+                <a16:creationId xmlns:a16="http://schemas.microsoft.com/office/drawing/2014/main" id="{2970C586-2DE4-7F7B-075B-EC22342F7AD0}"/>
+              </a:ext>
+            </a:extLst>
+          </p:cNvPr>
+          <p:cNvSpPr>
+            <a:spLocks noGrp="1"/>
+          </p:cNvSpPr>
+          <p:nvPr>
+            <p:ph type="title"/>
+          </p:nvPr>
+        </p:nvSpPr>
+        <p:spPr/>
+        <p:txBody>
+          <a:bodyPr/>
+          <a:lstStyle/>
+          <a:p>
+            <a:r>
+              <a:rPr lang="en-IN" dirty="0"/>
+              <a:t>S3 Data Lake Creation (Core Storage Layer)</a:t>
+            </a:r>
+            <a:endParaRPr lang="en-US" dirty="0"/>
+          </a:p>
+        </p:txBody>
+      </p:sp>
+      <p:sp>
+        <p:nvSpPr>
+          <p:cNvPr id="3" name="Content Placeholder 2">
+            <a:extLst>
+              <a:ext uri="{FF2B5EF4-FFF2-40B4-BE49-F238E27FC236}">
+                <a16:creationId xmlns:a16="http://schemas.microsoft.com/office/drawing/2014/main" id="{5EA10B41-3FFF-8DDB-2425-167FD01659F5}"/>
+              </a:ext>
+            </a:extLst>
+          </p:cNvPr>
+          <p:cNvSpPr>
+            <a:spLocks noGrp="1"/>
+          </p:cNvSpPr>
+          <p:nvPr>
+            <p:ph idx="1"/>
+          </p:nvPr>
+        </p:nvSpPr>
+        <p:spPr/>
+        <p:txBody>
+          <a:bodyPr/>
+          <a:lstStyle/>
+          <a:p>
+            <a:r>
+              <a:rPr lang="en-IN" b="1" dirty="0"/>
+              <a:t>What you did</a:t>
+            </a:r>
+          </a:p>
+          <a:p>
+            <a:r>
+              <a:rPr lang="en-IN" dirty="0"/>
+              <a:t>Created S3 bucket:</a:t>
+            </a:r>
+            <a:br>
+              <a:rPr lang="en-IN" dirty="0"/>
+            </a:br>
+            <a:r>
+              <a:rPr lang="en-IN" dirty="0"/>
+              <a:t>👉 analytics-ingested </a:t>
+            </a:r>
+          </a:p>
+          <a:p>
+            <a:r>
+              <a:rPr lang="en-IN" dirty="0"/>
+              <a:t>Designed </a:t>
+            </a:r>
+            <a:r>
+              <a:rPr lang="en-IN" b="1" dirty="0"/>
+              <a:t>partitioned storage format</a:t>
+            </a:r>
+            <a:r>
+              <a:rPr lang="en-IN" dirty="0"/>
+              <a:t>:</a:t>
+            </a:r>
+          </a:p>
+          <a:p>
+            <a:pPr marL="0" indent="0">
+              <a:buNone/>
+            </a:pPr>
+            <a:r>
+              <a:rPr lang="en-IN" dirty="0"/>
+              <a:t>employees/</a:t>
+            </a:r>
+            <a:br>
+              <a:rPr lang="en-IN" dirty="0"/>
+            </a:br>
+            <a:r>
+              <a:rPr lang="en-IN" dirty="0"/>
+              <a:t>  </a:t>
+            </a:r>
+            <a:r>
+              <a:rPr lang="en-IN" dirty="0" err="1"/>
+              <a:t>src_date</a:t>
+            </a:r>
+            <a:r>
+              <a:rPr lang="en-IN" dirty="0"/>
+              <a:t>=2026-04-09/</a:t>
+            </a:r>
+            <a:br>
+              <a:rPr lang="en-IN" dirty="0"/>
+            </a:br>
+            <a:r>
+              <a:rPr lang="en-IN" dirty="0"/>
+              <a:t>      </a:t>
+            </a:r>
+            <a:r>
+              <a:rPr lang="en-IN" dirty="0" err="1"/>
+              <a:t>file.parquet</a:t>
+            </a:r>
+            <a:br>
+              <a:rPr lang="en-IN" dirty="0"/>
+            </a:br>
+            <a:r>
+              <a:rPr lang="en-IN" dirty="0"/>
+              <a:t>  </a:t>
+            </a:r>
+            <a:r>
+              <a:rPr lang="en-IN" dirty="0" err="1"/>
+              <a:t>src_date</a:t>
+            </a:r>
+            <a:r>
+              <a:rPr lang="en-IN" dirty="0"/>
+              <a:t>=2026-04-08/</a:t>
+            </a:r>
+            <a:br>
+              <a:rPr lang="en-IN" dirty="0"/>
+            </a:br>
+            <a:r>
+              <a:rPr lang="en-IN" dirty="0"/>
+              <a:t>      </a:t>
+            </a:r>
+            <a:r>
+              <a:rPr lang="en-IN" dirty="0" err="1"/>
+              <a:t>file.parquet</a:t>
+            </a:r>
+            <a:endParaRPr lang="en-US" dirty="0"/>
+          </a:p>
+        </p:txBody>
+      </p:sp>
+    </p:spTree>
+    <p:extLst>
+      <p:ext uri="{BB962C8B-B14F-4D97-AF65-F5344CB8AC3E}">
+        <p14:creationId xmlns:p14="http://schemas.microsoft.com/office/powerpoint/2010/main" val="1739177630"/>
+      </p:ext>
+    </p:extLst>
+  </p:cSld>
+  <p:clrMapOvr>
+    <a:masterClrMapping/>
+  </p:clrMapOvr>
+</p:sld>
+</file>
+
+<file path=ppt/slides/slide29.xml><?xml version="1.0" encoding="utf-8"?>
+<p:sld xmlns:a="http://schemas.openxmlformats.org/drawingml/2006/main" xmlns:r="http://schemas.openxmlformats.org/officeDocument/2006/relationships" xmlns:p="http://schemas.openxmlformats.org/presentationml/2006/main">
+  <p:cSld>
+    <p:spTree>
+      <p:nvGrpSpPr>
+        <p:cNvPr id="1" name=""/>
+        <p:cNvGrpSpPr/>
+        <p:nvPr/>
+      </p:nvGrpSpPr>
+      <p:grpSpPr>
+        <a:xfrm>
+          <a:off x="0" y="0"/>
+          <a:ext cx="0" cy="0"/>
+          <a:chOff x="0" y="0"/>
+          <a:chExt cx="0" cy="0"/>
+        </a:xfrm>
+      </p:grpSpPr>
+      <p:sp>
+        <p:nvSpPr>
+          <p:cNvPr id="2" name="Title 1">
+            <a:extLst>
+              <a:ext uri="{FF2B5EF4-FFF2-40B4-BE49-F238E27FC236}">
+                <a16:creationId xmlns:a16="http://schemas.microsoft.com/office/drawing/2014/main" id="{CBE28259-B4C3-F272-4305-52BE43FB02F9}"/>
+              </a:ext>
+            </a:extLst>
+          </p:cNvPr>
+          <p:cNvSpPr>
+            <a:spLocks noGrp="1"/>
+          </p:cNvSpPr>
+          <p:nvPr>
+            <p:ph type="title"/>
+          </p:nvPr>
+        </p:nvSpPr>
+        <p:spPr/>
+        <p:txBody>
+          <a:bodyPr/>
+          <a:lstStyle/>
+          <a:p>
+            <a:endParaRPr lang="en-US"/>
+          </a:p>
+        </p:txBody>
+      </p:sp>
+      <p:sp>
+        <p:nvSpPr>
+          <p:cNvPr id="3" name="Content Placeholder 2">
+            <a:extLst>
+              <a:ext uri="{FF2B5EF4-FFF2-40B4-BE49-F238E27FC236}">
+                <a16:creationId xmlns:a16="http://schemas.microsoft.com/office/drawing/2014/main" id="{9CA2600E-2D65-E5C1-501F-C5CB6265BACB}"/>
+              </a:ext>
+            </a:extLst>
+          </p:cNvPr>
+          <p:cNvSpPr>
+            <a:spLocks noGrp="1"/>
+          </p:cNvSpPr>
+          <p:nvPr>
+            <p:ph idx="1"/>
+          </p:nvPr>
+        </p:nvSpPr>
+        <p:spPr/>
+        <p:txBody>
+          <a:bodyPr>
+            <a:normAutofit fontScale="92500" lnSpcReduction="20000"/>
+          </a:bodyPr>
+          <a:lstStyle/>
+          <a:p>
+            <a:r>
+              <a:rPr lang="en-IN" b="1" dirty="0"/>
+              <a:t>Why this is important (VERY important concept)</a:t>
+            </a:r>
+          </a:p>
+          <a:p>
+            <a:pPr marL="0" indent="0">
+              <a:buNone/>
+            </a:pPr>
+            <a:r>
+              <a:rPr lang="en-IN" b="1" dirty="0"/>
+              <a:t>        🔹 Partitioning = performance + cost optimization</a:t>
+            </a:r>
+          </a:p>
+          <a:p>
+            <a:r>
+              <a:rPr lang="en-IN" dirty="0"/>
+              <a:t>Without partition:</a:t>
+            </a:r>
+          </a:p>
+          <a:p>
+            <a:pPr marL="0" indent="0">
+              <a:buNone/>
+            </a:pPr>
+            <a:r>
+              <a:rPr lang="en-IN" dirty="0"/>
+              <a:t> SELECT * FROM employees;</a:t>
+            </a:r>
+          </a:p>
+          <a:p>
+            <a:r>
+              <a:rPr lang="en-IN" dirty="0"/>
+              <a:t>👉 scans </a:t>
+            </a:r>
+            <a:r>
+              <a:rPr lang="en-IN" b="1" dirty="0"/>
+              <a:t>all data</a:t>
+            </a:r>
+            <a:endParaRPr lang="en-IN" dirty="0"/>
+          </a:p>
+          <a:p>
+            <a:r>
+              <a:rPr lang="en-IN" dirty="0"/>
+              <a:t>With partition:</a:t>
+            </a:r>
+          </a:p>
+          <a:p>
+            <a:pPr marL="0" indent="0">
+              <a:buNone/>
+            </a:pPr>
+            <a:r>
+              <a:rPr lang="en-IN" dirty="0"/>
+              <a:t>SELECT * FROM employees WHERE </a:t>
+            </a:r>
+            <a:r>
+              <a:rPr lang="en-IN" dirty="0" err="1"/>
+              <a:t>src_date</a:t>
+            </a:r>
+            <a:r>
+              <a:rPr lang="en-IN" dirty="0"/>
+              <a:t> = '2026-04-09';</a:t>
+            </a:r>
+          </a:p>
+          <a:p>
+            <a:r>
+              <a:rPr lang="en-IN" dirty="0"/>
+              <a:t>👉 scans </a:t>
+            </a:r>
+            <a:r>
+              <a:rPr lang="en-IN" b="1" dirty="0"/>
+              <a:t>only that folder</a:t>
+            </a:r>
+            <a:endParaRPr lang="en-IN" dirty="0"/>
+          </a:p>
+          <a:p>
+            <a:r>
+              <a:rPr lang="en-IN" b="1" dirty="0"/>
+              <a:t>Key takeaway</a:t>
+            </a:r>
+          </a:p>
+          <a:p>
+            <a:r>
+              <a:rPr lang="en-IN" dirty="0"/>
+              <a:t>S3 is not just storage → it is your data lake</a:t>
+            </a:r>
+            <a:br>
+              <a:rPr lang="en-IN" dirty="0"/>
+            </a:br>
+            <a:r>
+              <a:rPr lang="en-IN" dirty="0"/>
+              <a:t>Folder structure = database partitioning</a:t>
+            </a:r>
+          </a:p>
+          <a:p>
+            <a:endParaRPr lang="en-US" dirty="0"/>
+          </a:p>
+        </p:txBody>
+      </p:sp>
+    </p:spTree>
+    <p:extLst>
+      <p:ext uri="{BB962C8B-B14F-4D97-AF65-F5344CB8AC3E}">
+        <p14:creationId xmlns:p14="http://schemas.microsoft.com/office/powerpoint/2010/main" val="1068744881"/>
+      </p:ext>
+    </p:extLst>
+  </p:cSld>
+  <p:clrMapOvr>
+    <a:masterClrMapping/>
+  </p:clrMapOvr>
+</p:sld>
+</file>
+
 <file path=ppt/slides/slide3.xml><?xml version="1.0" encoding="utf-8"?>
 <p:sld xmlns:a="http://schemas.openxmlformats.org/drawingml/2006/main" xmlns:r="http://schemas.openxmlformats.org/officeDocument/2006/relationships" xmlns:p="http://schemas.openxmlformats.org/presentationml/2006/main">
   <p:cSld>
@@ -16593,6 +17065,1462 @@
     <p:extLst>
       <p:ext uri="{BB962C8B-B14F-4D97-AF65-F5344CB8AC3E}">
         <p14:creationId xmlns:p14="http://schemas.microsoft.com/office/powerpoint/2010/main" val="3044339210"/>
+      </p:ext>
+    </p:extLst>
+  </p:cSld>
+  <p:clrMapOvr>
+    <a:masterClrMapping/>
+  </p:clrMapOvr>
+</p:sld>
+</file>
+
+<file path=ppt/slides/slide30.xml><?xml version="1.0" encoding="utf-8"?>
+<p:sld xmlns:a="http://schemas.openxmlformats.org/drawingml/2006/main" xmlns:r="http://schemas.openxmlformats.org/officeDocument/2006/relationships" xmlns:p="http://schemas.openxmlformats.org/presentationml/2006/main">
+  <p:cSld>
+    <p:spTree>
+      <p:nvGrpSpPr>
+        <p:cNvPr id="1" name=""/>
+        <p:cNvGrpSpPr/>
+        <p:nvPr/>
+      </p:nvGrpSpPr>
+      <p:grpSpPr>
+        <a:xfrm>
+          <a:off x="0" y="0"/>
+          <a:ext cx="0" cy="0"/>
+          <a:chOff x="0" y="0"/>
+          <a:chExt cx="0" cy="0"/>
+        </a:xfrm>
+      </p:grpSpPr>
+      <p:sp>
+        <p:nvSpPr>
+          <p:cNvPr id="2" name="Title 1">
+            <a:extLst>
+              <a:ext uri="{FF2B5EF4-FFF2-40B4-BE49-F238E27FC236}">
+                <a16:creationId xmlns:a16="http://schemas.microsoft.com/office/drawing/2014/main" id="{5D502DC2-A358-92C3-49C4-2FF2A80BECD1}"/>
+              </a:ext>
+            </a:extLst>
+          </p:cNvPr>
+          <p:cNvSpPr>
+            <a:spLocks noGrp="1"/>
+          </p:cNvSpPr>
+          <p:nvPr>
+            <p:ph type="title"/>
+          </p:nvPr>
+        </p:nvSpPr>
+        <p:spPr/>
+        <p:txBody>
+          <a:bodyPr/>
+          <a:lstStyle/>
+          <a:p>
+            <a:r>
+              <a:rPr lang="en-IN" dirty="0"/>
+              <a:t>Glue Crawler (Metadata Layer)</a:t>
+            </a:r>
+            <a:endParaRPr lang="en-US" dirty="0"/>
+          </a:p>
+        </p:txBody>
+      </p:sp>
+      <p:sp>
+        <p:nvSpPr>
+          <p:cNvPr id="3" name="Content Placeholder 2">
+            <a:extLst>
+              <a:ext uri="{FF2B5EF4-FFF2-40B4-BE49-F238E27FC236}">
+                <a16:creationId xmlns:a16="http://schemas.microsoft.com/office/drawing/2014/main" id="{A4141532-0939-5176-DAB3-CBCC6D9F04E3}"/>
+              </a:ext>
+            </a:extLst>
+          </p:cNvPr>
+          <p:cNvSpPr>
+            <a:spLocks noGrp="1"/>
+          </p:cNvSpPr>
+          <p:nvPr>
+            <p:ph idx="1"/>
+          </p:nvPr>
+        </p:nvSpPr>
+        <p:spPr/>
+        <p:txBody>
+          <a:bodyPr>
+            <a:normAutofit/>
+          </a:bodyPr>
+          <a:lstStyle/>
+          <a:p>
+            <a:pPr marL="0" indent="0">
+              <a:buNone/>
+            </a:pPr>
+            <a:r>
+              <a:rPr lang="en-IN" b="1" dirty="0"/>
+              <a:t>Step 1:</a:t>
+            </a:r>
+          </a:p>
+          <a:p>
+            <a:pPr marL="0" indent="0">
+              <a:buNone/>
+            </a:pPr>
+            <a:r>
+              <a:rPr lang="en-IN" dirty="0"/>
+              <a:t>Create an IAM role with below policies</a:t>
+            </a:r>
+          </a:p>
+          <a:p>
+            <a:r>
+              <a:rPr lang="en-IN" dirty="0" err="1"/>
+              <a:t>AWSGlueServiceRole</a:t>
+            </a:r>
+            <a:r>
+              <a:rPr lang="en-IN" dirty="0"/>
+              <a:t> and </a:t>
+            </a:r>
+            <a:r>
+              <a:rPr lang="en-IN" dirty="0">
+                <a:hlinkClick r:id="rId2"/>
+              </a:rPr>
+              <a:t>AmazonS3ReadOnlyAccess</a:t>
+            </a:r>
+            <a:endParaRPr lang="en-IN" dirty="0"/>
+          </a:p>
+          <a:p>
+            <a:r>
+              <a:rPr lang="en-IN" dirty="0"/>
+              <a:t>Permissions: </a:t>
+            </a:r>
+          </a:p>
+          <a:p>
+            <a:pPr lvl="1"/>
+            <a:r>
+              <a:rPr lang="en-IN" dirty="0"/>
+              <a:t>Read S3 </a:t>
+            </a:r>
+          </a:p>
+          <a:p>
+            <a:pPr lvl="1"/>
+            <a:r>
+              <a:rPr lang="en-IN" dirty="0"/>
+              <a:t>Write metadata</a:t>
+            </a:r>
+          </a:p>
+          <a:p>
+            <a:pPr marL="0" indent="0">
+              <a:buNone/>
+            </a:pPr>
+            <a:r>
+              <a:rPr lang="en-IN" b="1" dirty="0"/>
+              <a:t>Step 2: </a:t>
+            </a:r>
+          </a:p>
+          <a:p>
+            <a:pPr marL="0" indent="0">
+              <a:buNone/>
+            </a:pPr>
+            <a:r>
+              <a:rPr lang="en-IN" dirty="0"/>
+              <a:t>Create a glue crawler with the role created.</a:t>
+            </a:r>
+          </a:p>
+        </p:txBody>
+      </p:sp>
+    </p:spTree>
+    <p:extLst>
+      <p:ext uri="{BB962C8B-B14F-4D97-AF65-F5344CB8AC3E}">
+        <p14:creationId xmlns:p14="http://schemas.microsoft.com/office/powerpoint/2010/main" val="3960498656"/>
+      </p:ext>
+    </p:extLst>
+  </p:cSld>
+  <p:clrMapOvr>
+    <a:masterClrMapping/>
+  </p:clrMapOvr>
+</p:sld>
+</file>
+
+<file path=ppt/slides/slide31.xml><?xml version="1.0" encoding="utf-8"?>
+<p:sld xmlns:a="http://schemas.openxmlformats.org/drawingml/2006/main" xmlns:r="http://schemas.openxmlformats.org/officeDocument/2006/relationships" xmlns:p="http://schemas.openxmlformats.org/presentationml/2006/main">
+  <p:cSld>
+    <p:spTree>
+      <p:nvGrpSpPr>
+        <p:cNvPr id="1" name=""/>
+        <p:cNvGrpSpPr/>
+        <p:nvPr/>
+      </p:nvGrpSpPr>
+      <p:grpSpPr>
+        <a:xfrm>
+          <a:off x="0" y="0"/>
+          <a:ext cx="0" cy="0"/>
+          <a:chOff x="0" y="0"/>
+          <a:chExt cx="0" cy="0"/>
+        </a:xfrm>
+      </p:grpSpPr>
+      <p:sp>
+        <p:nvSpPr>
+          <p:cNvPr id="2" name="Title 1">
+            <a:extLst>
+              <a:ext uri="{FF2B5EF4-FFF2-40B4-BE49-F238E27FC236}">
+                <a16:creationId xmlns:a16="http://schemas.microsoft.com/office/drawing/2014/main" id="{011E0EAC-1D83-0D74-DE8B-FC9F0E3271A5}"/>
+              </a:ext>
+            </a:extLst>
+          </p:cNvPr>
+          <p:cNvSpPr>
+            <a:spLocks noGrp="1"/>
+          </p:cNvSpPr>
+          <p:nvPr>
+            <p:ph type="title"/>
+          </p:nvPr>
+        </p:nvSpPr>
+        <p:spPr/>
+        <p:txBody>
+          <a:bodyPr/>
+          <a:lstStyle/>
+          <a:p>
+            <a:endParaRPr lang="en-US"/>
+          </a:p>
+        </p:txBody>
+      </p:sp>
+      <p:sp>
+        <p:nvSpPr>
+          <p:cNvPr id="3" name="Content Placeholder 2">
+            <a:extLst>
+              <a:ext uri="{FF2B5EF4-FFF2-40B4-BE49-F238E27FC236}">
+                <a16:creationId xmlns:a16="http://schemas.microsoft.com/office/drawing/2014/main" id="{CC81FDF1-0CA2-2F46-A176-CFC6683FF44A}"/>
+              </a:ext>
+            </a:extLst>
+          </p:cNvPr>
+          <p:cNvSpPr>
+            <a:spLocks noGrp="1"/>
+          </p:cNvSpPr>
+          <p:nvPr>
+            <p:ph idx="1"/>
+          </p:nvPr>
+        </p:nvSpPr>
+        <p:spPr/>
+        <p:txBody>
+          <a:bodyPr>
+            <a:normAutofit/>
+          </a:bodyPr>
+          <a:lstStyle/>
+          <a:p>
+            <a:pPr marL="0" indent="0">
+              <a:buNone/>
+            </a:pPr>
+            <a:r>
+              <a:rPr lang="en-IN" b="1" dirty="0"/>
+              <a:t>Step 3:</a:t>
+            </a:r>
+          </a:p>
+          <a:p>
+            <a:pPr marL="0" indent="0">
+              <a:buNone/>
+            </a:pPr>
+            <a:r>
+              <a:rPr lang="en-IN" dirty="0"/>
+              <a:t>✔ Choose Data source</a:t>
+            </a:r>
+          </a:p>
+          <a:p>
+            <a:r>
+              <a:rPr lang="en-IN" dirty="0"/>
+              <a:t>S3 path → s3://analytics-ingested/employees/</a:t>
+            </a:r>
+          </a:p>
+          <a:p>
+            <a:pPr marL="0" indent="0">
+              <a:buNone/>
+            </a:pPr>
+            <a:endParaRPr lang="en-US" dirty="0"/>
+          </a:p>
+          <a:p>
+            <a:pPr marL="0" indent="0">
+              <a:buNone/>
+            </a:pPr>
+            <a:r>
+              <a:rPr lang="en-US" b="1" dirty="0"/>
+              <a:t>Step 4:</a:t>
+            </a:r>
+          </a:p>
+          <a:p>
+            <a:pPr marL="0" indent="0">
+              <a:buNone/>
+            </a:pPr>
+            <a:r>
+              <a:rPr lang="en-US" dirty="0"/>
+              <a:t>Run the glue crawler manually.</a:t>
+            </a:r>
+            <a:br>
+              <a:rPr lang="en-US" dirty="0"/>
+            </a:br>
+            <a:endParaRPr lang="en-US" dirty="0"/>
+          </a:p>
+          <a:p>
+            <a:pPr marL="0" indent="0">
+              <a:buNone/>
+            </a:pPr>
+            <a:r>
+              <a:rPr lang="en-US" dirty="0"/>
+              <a:t>Output:</a:t>
+            </a:r>
+          </a:p>
+          <a:p>
+            <a:pPr marL="0" indent="0">
+              <a:buNone/>
+            </a:pPr>
+            <a:r>
+              <a:rPr lang="en-IN" dirty="0"/>
+              <a:t>Employees table is created automatically</a:t>
+            </a:r>
+            <a:endParaRPr lang="en-US" dirty="0"/>
+          </a:p>
+        </p:txBody>
+      </p:sp>
+    </p:spTree>
+    <p:extLst>
+      <p:ext uri="{BB962C8B-B14F-4D97-AF65-F5344CB8AC3E}">
+        <p14:creationId xmlns:p14="http://schemas.microsoft.com/office/powerpoint/2010/main" val="3643449217"/>
+      </p:ext>
+    </p:extLst>
+  </p:cSld>
+  <p:clrMapOvr>
+    <a:masterClrMapping/>
+  </p:clrMapOvr>
+</p:sld>
+</file>
+
+<file path=ppt/slides/slide32.xml><?xml version="1.0" encoding="utf-8"?>
+<p:sld xmlns:a="http://schemas.openxmlformats.org/drawingml/2006/main" xmlns:r="http://schemas.openxmlformats.org/officeDocument/2006/relationships" xmlns:p="http://schemas.openxmlformats.org/presentationml/2006/main">
+  <p:cSld>
+    <p:spTree>
+      <p:nvGrpSpPr>
+        <p:cNvPr id="1" name=""/>
+        <p:cNvGrpSpPr/>
+        <p:nvPr/>
+      </p:nvGrpSpPr>
+      <p:grpSpPr>
+        <a:xfrm>
+          <a:off x="0" y="0"/>
+          <a:ext cx="0" cy="0"/>
+          <a:chOff x="0" y="0"/>
+          <a:chExt cx="0" cy="0"/>
+        </a:xfrm>
+      </p:grpSpPr>
+      <p:sp>
+        <p:nvSpPr>
+          <p:cNvPr id="2" name="Title 1">
+            <a:extLst>
+              <a:ext uri="{FF2B5EF4-FFF2-40B4-BE49-F238E27FC236}">
+                <a16:creationId xmlns:a16="http://schemas.microsoft.com/office/drawing/2014/main" id="{706D7890-E825-5A73-1559-0F6AC5082003}"/>
+              </a:ext>
+            </a:extLst>
+          </p:cNvPr>
+          <p:cNvSpPr>
+            <a:spLocks noGrp="1"/>
+          </p:cNvSpPr>
+          <p:nvPr>
+            <p:ph type="title"/>
+          </p:nvPr>
+        </p:nvSpPr>
+        <p:spPr/>
+        <p:txBody>
+          <a:bodyPr/>
+          <a:lstStyle/>
+          <a:p>
+            <a:r>
+              <a:rPr lang="en-IN" dirty="0"/>
+              <a:t>What crawler actually does</a:t>
+            </a:r>
+            <a:endParaRPr lang="en-US" dirty="0"/>
+          </a:p>
+        </p:txBody>
+      </p:sp>
+      <p:sp>
+        <p:nvSpPr>
+          <p:cNvPr id="3" name="Content Placeholder 2">
+            <a:extLst>
+              <a:ext uri="{FF2B5EF4-FFF2-40B4-BE49-F238E27FC236}">
+                <a16:creationId xmlns:a16="http://schemas.microsoft.com/office/drawing/2014/main" id="{BE2C7DBC-1645-D8DC-A0D7-E520DB8A346D}"/>
+              </a:ext>
+            </a:extLst>
+          </p:cNvPr>
+          <p:cNvSpPr>
+            <a:spLocks noGrp="1"/>
+          </p:cNvSpPr>
+          <p:nvPr>
+            <p:ph idx="1"/>
+          </p:nvPr>
+        </p:nvSpPr>
+        <p:spPr/>
+        <p:txBody>
+          <a:bodyPr>
+            <a:normAutofit fontScale="85000" lnSpcReduction="20000"/>
+          </a:bodyPr>
+          <a:lstStyle/>
+          <a:p>
+            <a:r>
+              <a:rPr lang="en-IN" dirty="0"/>
+              <a:t>When you run it:</a:t>
+            </a:r>
+          </a:p>
+          <a:p>
+            <a:r>
+              <a:rPr lang="en-IN" dirty="0"/>
+              <a:t>Reads S3 files </a:t>
+            </a:r>
+          </a:p>
+          <a:p>
+            <a:r>
+              <a:rPr lang="en-IN" dirty="0"/>
+              <a:t>Detects: </a:t>
+            </a:r>
+          </a:p>
+          <a:p>
+            <a:pPr lvl="1"/>
+            <a:r>
+              <a:rPr lang="en-IN" dirty="0"/>
+              <a:t>File format → Parquet </a:t>
+            </a:r>
+          </a:p>
+          <a:p>
+            <a:pPr lvl="1"/>
+            <a:r>
+              <a:rPr lang="en-IN" dirty="0"/>
+              <a:t>Schema → id, name, salary </a:t>
+            </a:r>
+          </a:p>
+          <a:p>
+            <a:r>
+              <a:rPr lang="en-IN" dirty="0"/>
+              <a:t>Detects partition: </a:t>
+            </a:r>
+          </a:p>
+          <a:p>
+            <a:r>
+              <a:rPr lang="en-IN" dirty="0" err="1"/>
+              <a:t>src_date</a:t>
+            </a:r>
+            <a:r>
+              <a:rPr lang="en-IN" dirty="0"/>
+              <a:t>=2026-04-09</a:t>
+            </a:r>
+          </a:p>
+          <a:p>
+            <a:r>
+              <a:rPr lang="en-IN" dirty="0"/>
+              <a:t>Creates: </a:t>
+            </a:r>
+          </a:p>
+          <a:p>
+            <a:pPr lvl="1"/>
+            <a:r>
+              <a:rPr lang="en-IN" dirty="0"/>
+              <a:t>Table </a:t>
+            </a:r>
+          </a:p>
+          <a:p>
+            <a:pPr lvl="1"/>
+            <a:r>
+              <a:rPr lang="en-IN" dirty="0"/>
+              <a:t>Partition metadata</a:t>
+            </a:r>
+          </a:p>
+          <a:p>
+            <a:r>
+              <a:rPr lang="en-IN" b="1" dirty="0"/>
+              <a:t>🧠 Important concept</a:t>
+            </a:r>
+          </a:p>
+          <a:p>
+            <a:r>
+              <a:rPr lang="en-IN" dirty="0"/>
+              <a:t>Glue DOES NOT move data</a:t>
+            </a:r>
+            <a:br>
+              <a:rPr lang="en-IN" dirty="0"/>
+            </a:br>
+            <a:r>
+              <a:rPr lang="en-IN" dirty="0"/>
+              <a:t>Glue only creates metadata (like schema registry)</a:t>
+            </a:r>
+          </a:p>
+          <a:p>
+            <a:pPr marL="228600" lvl="1" indent="0">
+              <a:buNone/>
+            </a:pPr>
+            <a:endParaRPr lang="en-IN" dirty="0"/>
+          </a:p>
+          <a:p>
+            <a:endParaRPr lang="en-US" dirty="0"/>
+          </a:p>
+        </p:txBody>
+      </p:sp>
+    </p:spTree>
+    <p:extLst>
+      <p:ext uri="{BB962C8B-B14F-4D97-AF65-F5344CB8AC3E}">
+        <p14:creationId xmlns:p14="http://schemas.microsoft.com/office/powerpoint/2010/main" val="391369525"/>
+      </p:ext>
+    </p:extLst>
+  </p:cSld>
+  <p:clrMapOvr>
+    <a:masterClrMapping/>
+  </p:clrMapOvr>
+</p:sld>
+</file>
+
+<file path=ppt/slides/slide33.xml><?xml version="1.0" encoding="utf-8"?>
+<p:sld xmlns:a="http://schemas.openxmlformats.org/drawingml/2006/main" xmlns:r="http://schemas.openxmlformats.org/officeDocument/2006/relationships" xmlns:p="http://schemas.openxmlformats.org/presentationml/2006/main">
+  <p:cSld>
+    <p:spTree>
+      <p:nvGrpSpPr>
+        <p:cNvPr id="1" name=""/>
+        <p:cNvGrpSpPr/>
+        <p:nvPr/>
+      </p:nvGrpSpPr>
+      <p:grpSpPr>
+        <a:xfrm>
+          <a:off x="0" y="0"/>
+          <a:ext cx="0" cy="0"/>
+          <a:chOff x="0" y="0"/>
+          <a:chExt cx="0" cy="0"/>
+        </a:xfrm>
+      </p:grpSpPr>
+      <p:sp>
+        <p:nvSpPr>
+          <p:cNvPr id="2" name="Title 1">
+            <a:extLst>
+              <a:ext uri="{FF2B5EF4-FFF2-40B4-BE49-F238E27FC236}">
+                <a16:creationId xmlns:a16="http://schemas.microsoft.com/office/drawing/2014/main" id="{9A03381E-E861-CD72-0CF7-846B7F155CA0}"/>
+              </a:ext>
+            </a:extLst>
+          </p:cNvPr>
+          <p:cNvSpPr>
+            <a:spLocks noGrp="1"/>
+          </p:cNvSpPr>
+          <p:nvPr>
+            <p:ph type="title"/>
+          </p:nvPr>
+        </p:nvSpPr>
+        <p:spPr/>
+        <p:txBody>
+          <a:bodyPr/>
+          <a:lstStyle/>
+          <a:p>
+            <a:r>
+              <a:rPr lang="en-IN" dirty="0"/>
+              <a:t>Athena Query Layer (SQL on S3)</a:t>
+            </a:r>
+            <a:endParaRPr lang="en-US" dirty="0"/>
+          </a:p>
+        </p:txBody>
+      </p:sp>
+      <p:sp>
+        <p:nvSpPr>
+          <p:cNvPr id="3" name="Content Placeholder 2">
+            <a:extLst>
+              <a:ext uri="{FF2B5EF4-FFF2-40B4-BE49-F238E27FC236}">
+                <a16:creationId xmlns:a16="http://schemas.microsoft.com/office/drawing/2014/main" id="{79D5D5EC-0A81-1A0D-2084-7FC1B53E6ECA}"/>
+              </a:ext>
+            </a:extLst>
+          </p:cNvPr>
+          <p:cNvSpPr>
+            <a:spLocks noGrp="1"/>
+          </p:cNvSpPr>
+          <p:nvPr>
+            <p:ph idx="1"/>
+          </p:nvPr>
+        </p:nvSpPr>
+        <p:spPr/>
+        <p:txBody>
+          <a:bodyPr>
+            <a:normAutofit fontScale="77500" lnSpcReduction="20000"/>
+          </a:bodyPr>
+          <a:lstStyle/>
+          <a:p>
+            <a:r>
+              <a:rPr lang="en-IN" b="1" dirty="0"/>
+              <a:t>What happens internally</a:t>
+            </a:r>
+          </a:p>
+          <a:p>
+            <a:pPr marL="0" indent="0">
+              <a:buNone/>
+            </a:pPr>
+            <a:r>
+              <a:rPr lang="en-IN" b="1" dirty="0"/>
+              <a:t>Athena:</a:t>
+            </a:r>
+          </a:p>
+          <a:p>
+            <a:r>
+              <a:rPr lang="en-IN" dirty="0"/>
+              <a:t>Reads schema from Glue </a:t>
+            </a:r>
+          </a:p>
+          <a:p>
+            <a:r>
+              <a:rPr lang="en-IN" dirty="0"/>
+              <a:t>Reads files from S3 </a:t>
+            </a:r>
+          </a:p>
+          <a:p>
+            <a:r>
+              <a:rPr lang="en-IN" dirty="0"/>
+              <a:t>Executes query </a:t>
+            </a:r>
+          </a:p>
+          <a:p>
+            <a:br>
+              <a:rPr lang="en-IN" dirty="0"/>
+            </a:br>
+            <a:endParaRPr lang="en-IN" dirty="0"/>
+          </a:p>
+          <a:p>
+            <a:r>
+              <a:rPr lang="en-IN" b="1" dirty="0"/>
+              <a:t>Result we see</a:t>
+            </a:r>
+          </a:p>
+          <a:p>
+            <a:r>
+              <a:rPr lang="en-IN" dirty="0"/>
+              <a:t>Data displayed correctly </a:t>
+            </a:r>
+          </a:p>
+          <a:p>
+            <a:r>
+              <a:rPr lang="en-IN" dirty="0"/>
+              <a:t>Partition column visible (</a:t>
+            </a:r>
+            <a:r>
+              <a:rPr lang="en-IN" dirty="0" err="1"/>
+              <a:t>src_date</a:t>
+            </a:r>
+            <a:r>
+              <a:rPr lang="en-IN" dirty="0"/>
+              <a:t>)</a:t>
+            </a:r>
+          </a:p>
+          <a:p>
+            <a:r>
+              <a:rPr lang="en-IN" b="1" dirty="0"/>
+              <a:t>🧠 Key concept</a:t>
+            </a:r>
+          </a:p>
+          <a:p>
+            <a:r>
+              <a:rPr lang="en-IN" dirty="0"/>
+              <a:t>Athena = serverless SQL engine on S3</a:t>
+            </a:r>
+            <a:br>
+              <a:rPr lang="en-IN" dirty="0"/>
+            </a:br>
+            <a:r>
+              <a:rPr lang="en-IN" dirty="0"/>
+              <a:t>You pay per data scanned</a:t>
+            </a:r>
+          </a:p>
+          <a:p>
+            <a:pPr marL="0" indent="0">
+              <a:buNone/>
+            </a:pPr>
+            <a:endParaRPr lang="en-IN" dirty="0"/>
+          </a:p>
+          <a:p>
+            <a:endParaRPr lang="en-US" dirty="0"/>
+          </a:p>
+        </p:txBody>
+      </p:sp>
+    </p:spTree>
+    <p:extLst>
+      <p:ext uri="{BB962C8B-B14F-4D97-AF65-F5344CB8AC3E}">
+        <p14:creationId xmlns:p14="http://schemas.microsoft.com/office/powerpoint/2010/main" val="65628389"/>
+      </p:ext>
+    </p:extLst>
+  </p:cSld>
+  <p:clrMapOvr>
+    <a:masterClrMapping/>
+  </p:clrMapOvr>
+</p:sld>
+</file>
+
+<file path=ppt/slides/slide34.xml><?xml version="1.0" encoding="utf-8"?>
+<p:sld xmlns:a="http://schemas.openxmlformats.org/drawingml/2006/main" xmlns:r="http://schemas.openxmlformats.org/officeDocument/2006/relationships" xmlns:p="http://schemas.openxmlformats.org/presentationml/2006/main">
+  <p:cSld>
+    <p:spTree>
+      <p:nvGrpSpPr>
+        <p:cNvPr id="1" name=""/>
+        <p:cNvGrpSpPr/>
+        <p:nvPr/>
+      </p:nvGrpSpPr>
+      <p:grpSpPr>
+        <a:xfrm>
+          <a:off x="0" y="0"/>
+          <a:ext cx="0" cy="0"/>
+          <a:chOff x="0" y="0"/>
+          <a:chExt cx="0" cy="0"/>
+        </a:xfrm>
+      </p:grpSpPr>
+      <p:sp>
+        <p:nvSpPr>
+          <p:cNvPr id="2" name="Title 1">
+            <a:extLst>
+              <a:ext uri="{FF2B5EF4-FFF2-40B4-BE49-F238E27FC236}">
+                <a16:creationId xmlns:a16="http://schemas.microsoft.com/office/drawing/2014/main" id="{8F486EA3-F9FF-6987-2DEF-48DAC15CDDB6}"/>
+              </a:ext>
+            </a:extLst>
+          </p:cNvPr>
+          <p:cNvSpPr>
+            <a:spLocks noGrp="1"/>
+          </p:cNvSpPr>
+          <p:nvPr>
+            <p:ph type="title"/>
+          </p:nvPr>
+        </p:nvSpPr>
+        <p:spPr/>
+        <p:txBody>
+          <a:bodyPr/>
+          <a:lstStyle/>
+          <a:p>
+            <a:r>
+              <a:rPr lang="en-IN" dirty="0"/>
+              <a:t>Lambda Automation (Event-driven orchestration)</a:t>
+            </a:r>
+            <a:endParaRPr lang="en-US" dirty="0"/>
+          </a:p>
+        </p:txBody>
+      </p:sp>
+      <p:sp>
+        <p:nvSpPr>
+          <p:cNvPr id="3" name="Content Placeholder 2">
+            <a:extLst>
+              <a:ext uri="{FF2B5EF4-FFF2-40B4-BE49-F238E27FC236}">
+                <a16:creationId xmlns:a16="http://schemas.microsoft.com/office/drawing/2014/main" id="{8A5DE34F-0FF6-9795-C933-8C401A26D4D4}"/>
+              </a:ext>
+            </a:extLst>
+          </p:cNvPr>
+          <p:cNvSpPr>
+            <a:spLocks noGrp="1"/>
+          </p:cNvSpPr>
+          <p:nvPr>
+            <p:ph idx="1"/>
+          </p:nvPr>
+        </p:nvSpPr>
+        <p:spPr/>
+        <p:txBody>
+          <a:bodyPr/>
+          <a:lstStyle/>
+          <a:p>
+            <a:pPr marL="0" indent="0">
+              <a:buNone/>
+            </a:pPr>
+            <a:r>
+              <a:rPr lang="en-US" u="sng" dirty="0"/>
+              <a:t>Sample lambda function:</a:t>
+            </a:r>
+          </a:p>
+          <a:p>
+            <a:pPr marL="0" indent="0">
+              <a:buNone/>
+            </a:pPr>
+            <a:br>
+              <a:rPr lang="en-US" dirty="0"/>
+            </a:br>
+            <a:r>
+              <a:rPr lang="en-IN" dirty="0"/>
+              <a:t>import boto3</a:t>
+            </a:r>
+            <a:br>
+              <a:rPr lang="en-IN" dirty="0"/>
+            </a:br>
+            <a:br>
+              <a:rPr lang="en-IN" dirty="0"/>
+            </a:br>
+            <a:r>
+              <a:rPr lang="en-IN" dirty="0"/>
+              <a:t>glue = boto3.client('glue')</a:t>
+            </a:r>
+            <a:br>
+              <a:rPr lang="en-IN" dirty="0"/>
+            </a:br>
+            <a:br>
+              <a:rPr lang="en-IN" dirty="0"/>
+            </a:br>
+            <a:r>
+              <a:rPr lang="en-IN" dirty="0"/>
+              <a:t>def </a:t>
+            </a:r>
+            <a:r>
+              <a:rPr lang="en-IN" dirty="0" err="1"/>
+              <a:t>lambda_handler</a:t>
+            </a:r>
+            <a:r>
+              <a:rPr lang="en-IN" dirty="0"/>
+              <a:t>(event, context):</a:t>
+            </a:r>
+            <a:br>
+              <a:rPr lang="en-IN" dirty="0"/>
+            </a:br>
+            <a:r>
+              <a:rPr lang="en-IN" dirty="0"/>
+              <a:t>      </a:t>
+            </a:r>
+            <a:r>
+              <a:rPr lang="en-IN" dirty="0" err="1"/>
+              <a:t>glue.start_crawler</a:t>
+            </a:r>
+            <a:r>
+              <a:rPr lang="en-IN" dirty="0"/>
+              <a:t>(Name="s3-processed-crawler")</a:t>
+            </a:r>
+            <a:endParaRPr lang="en-US" dirty="0"/>
+          </a:p>
+        </p:txBody>
+      </p:sp>
+    </p:spTree>
+    <p:extLst>
+      <p:ext uri="{BB962C8B-B14F-4D97-AF65-F5344CB8AC3E}">
+        <p14:creationId xmlns:p14="http://schemas.microsoft.com/office/powerpoint/2010/main" val="1382955036"/>
+      </p:ext>
+    </p:extLst>
+  </p:cSld>
+  <p:clrMapOvr>
+    <a:masterClrMapping/>
+  </p:clrMapOvr>
+</p:sld>
+</file>
+
+<file path=ppt/slides/slide35.xml><?xml version="1.0" encoding="utf-8"?>
+<p:sld xmlns:a="http://schemas.openxmlformats.org/drawingml/2006/main" xmlns:r="http://schemas.openxmlformats.org/officeDocument/2006/relationships" xmlns:p="http://schemas.openxmlformats.org/presentationml/2006/main">
+  <p:cSld>
+    <p:spTree>
+      <p:nvGrpSpPr>
+        <p:cNvPr id="1" name=""/>
+        <p:cNvGrpSpPr/>
+        <p:nvPr/>
+      </p:nvGrpSpPr>
+      <p:grpSpPr>
+        <a:xfrm>
+          <a:off x="0" y="0"/>
+          <a:ext cx="0" cy="0"/>
+          <a:chOff x="0" y="0"/>
+          <a:chExt cx="0" cy="0"/>
+        </a:xfrm>
+      </p:grpSpPr>
+      <p:sp>
+        <p:nvSpPr>
+          <p:cNvPr id="2" name="Title 1">
+            <a:extLst>
+              <a:ext uri="{FF2B5EF4-FFF2-40B4-BE49-F238E27FC236}">
+                <a16:creationId xmlns:a16="http://schemas.microsoft.com/office/drawing/2014/main" id="{8FE22AA9-09C2-3384-3DA5-44D7A02A92F2}"/>
+              </a:ext>
+            </a:extLst>
+          </p:cNvPr>
+          <p:cNvSpPr>
+            <a:spLocks noGrp="1"/>
+          </p:cNvSpPr>
+          <p:nvPr>
+            <p:ph type="title"/>
+          </p:nvPr>
+        </p:nvSpPr>
+        <p:spPr/>
+        <p:txBody>
+          <a:bodyPr/>
+          <a:lstStyle/>
+          <a:p>
+            <a:r>
+              <a:rPr lang="en-US" dirty="0"/>
+              <a:t>Automate the glue crawler call</a:t>
+            </a:r>
+          </a:p>
+        </p:txBody>
+      </p:sp>
+      <p:sp>
+        <p:nvSpPr>
+          <p:cNvPr id="3" name="Content Placeholder 2">
+            <a:extLst>
+              <a:ext uri="{FF2B5EF4-FFF2-40B4-BE49-F238E27FC236}">
+                <a16:creationId xmlns:a16="http://schemas.microsoft.com/office/drawing/2014/main" id="{F0AEF589-5FAA-B623-D182-A515CDB7EE4A}"/>
+              </a:ext>
+            </a:extLst>
+          </p:cNvPr>
+          <p:cNvSpPr>
+            <a:spLocks noGrp="1"/>
+          </p:cNvSpPr>
+          <p:nvPr>
+            <p:ph idx="1"/>
+          </p:nvPr>
+        </p:nvSpPr>
+        <p:spPr/>
+        <p:txBody>
+          <a:bodyPr/>
+          <a:lstStyle/>
+          <a:p>
+            <a:r>
+              <a:rPr lang="en-IN" b="1" dirty="0"/>
+              <a:t>Trigger configuration – </a:t>
+            </a:r>
+            <a:r>
+              <a:rPr lang="en-IN" dirty="0"/>
+              <a:t>Creates a trigger, so that whenever an object is put in</a:t>
+            </a:r>
+            <a:r>
+              <a:rPr lang="en-IN" b="1" dirty="0"/>
+              <a:t> “</a:t>
+            </a:r>
+            <a:r>
+              <a:rPr lang="en-IN" dirty="0"/>
+              <a:t>analytics-ingested</a:t>
+            </a:r>
+            <a:r>
+              <a:rPr lang="en-IN" b="1" dirty="0"/>
+              <a:t>/</a:t>
+            </a:r>
+            <a:r>
+              <a:rPr lang="en-IN" dirty="0"/>
+              <a:t>employees/*.parquet”, the lambda function will be triggered,</a:t>
+            </a:r>
+            <a:endParaRPr lang="en-IN" b="1" dirty="0"/>
+          </a:p>
+          <a:p>
+            <a:r>
+              <a:rPr lang="en-IN" dirty="0"/>
+              <a:t>S3 → Lambda:</a:t>
+            </a:r>
+          </a:p>
+          <a:p>
+            <a:pPr lvl="1"/>
+            <a:r>
+              <a:rPr lang="en-IN" dirty="0"/>
+              <a:t>Bucket: analytics-ingested </a:t>
+            </a:r>
+          </a:p>
+          <a:p>
+            <a:pPr lvl="1"/>
+            <a:r>
+              <a:rPr lang="en-IN" dirty="0"/>
+              <a:t>Event: PUT </a:t>
+            </a:r>
+          </a:p>
+          <a:p>
+            <a:pPr lvl="1"/>
+            <a:r>
+              <a:rPr lang="en-IN" dirty="0"/>
+              <a:t>Prefix: employees/ </a:t>
+            </a:r>
+          </a:p>
+          <a:p>
+            <a:pPr lvl="1"/>
+            <a:r>
+              <a:rPr lang="en-IN" dirty="0"/>
+              <a:t>Suffix: .parquet</a:t>
+            </a:r>
+          </a:p>
+          <a:p>
+            <a:endParaRPr lang="en-US" dirty="0"/>
+          </a:p>
+        </p:txBody>
+      </p:sp>
+    </p:spTree>
+    <p:extLst>
+      <p:ext uri="{BB962C8B-B14F-4D97-AF65-F5344CB8AC3E}">
+        <p14:creationId xmlns:p14="http://schemas.microsoft.com/office/powerpoint/2010/main" val="2433018361"/>
+      </p:ext>
+    </p:extLst>
+  </p:cSld>
+  <p:clrMapOvr>
+    <a:masterClrMapping/>
+  </p:clrMapOvr>
+</p:sld>
+</file>
+
+<file path=ppt/slides/slide36.xml><?xml version="1.0" encoding="utf-8"?>
+<p:sld xmlns:a="http://schemas.openxmlformats.org/drawingml/2006/main" xmlns:r="http://schemas.openxmlformats.org/officeDocument/2006/relationships" xmlns:p="http://schemas.openxmlformats.org/presentationml/2006/main">
+  <p:cSld>
+    <p:spTree>
+      <p:nvGrpSpPr>
+        <p:cNvPr id="1" name=""/>
+        <p:cNvGrpSpPr/>
+        <p:nvPr/>
+      </p:nvGrpSpPr>
+      <p:grpSpPr>
+        <a:xfrm>
+          <a:off x="0" y="0"/>
+          <a:ext cx="0" cy="0"/>
+          <a:chOff x="0" y="0"/>
+          <a:chExt cx="0" cy="0"/>
+        </a:xfrm>
+      </p:grpSpPr>
+      <p:sp>
+        <p:nvSpPr>
+          <p:cNvPr id="2" name="Title 1">
+            <a:extLst>
+              <a:ext uri="{FF2B5EF4-FFF2-40B4-BE49-F238E27FC236}">
+                <a16:creationId xmlns:a16="http://schemas.microsoft.com/office/drawing/2014/main" id="{BD61819A-2DA2-0F0A-3E6C-7A8E6DB117EF}"/>
+              </a:ext>
+            </a:extLst>
+          </p:cNvPr>
+          <p:cNvSpPr>
+            <a:spLocks noGrp="1"/>
+          </p:cNvSpPr>
+          <p:nvPr>
+            <p:ph type="title"/>
+          </p:nvPr>
+        </p:nvSpPr>
+        <p:spPr/>
+        <p:txBody>
+          <a:bodyPr/>
+          <a:lstStyle/>
+          <a:p>
+            <a:endParaRPr lang="en-US"/>
+          </a:p>
+        </p:txBody>
+      </p:sp>
+      <p:sp>
+        <p:nvSpPr>
+          <p:cNvPr id="3" name="Content Placeholder 2">
+            <a:extLst>
+              <a:ext uri="{FF2B5EF4-FFF2-40B4-BE49-F238E27FC236}">
+                <a16:creationId xmlns:a16="http://schemas.microsoft.com/office/drawing/2014/main" id="{EFEC71A4-D747-5068-0D14-7EF6FE9A16BF}"/>
+              </a:ext>
+            </a:extLst>
+          </p:cNvPr>
+          <p:cNvSpPr>
+            <a:spLocks noGrp="1"/>
+          </p:cNvSpPr>
+          <p:nvPr>
+            <p:ph idx="1"/>
+          </p:nvPr>
+        </p:nvSpPr>
+        <p:spPr/>
+        <p:txBody>
+          <a:bodyPr/>
+          <a:lstStyle/>
+          <a:p>
+            <a:r>
+              <a:rPr lang="en-IN" b="1" dirty="0"/>
+              <a:t>Flow</a:t>
+            </a:r>
+          </a:p>
+          <a:p>
+            <a:r>
+              <a:rPr lang="en-IN" dirty="0"/>
+              <a:t>New parquet file uploaded</a:t>
+            </a:r>
+            <a:br>
+              <a:rPr lang="en-IN" dirty="0"/>
+            </a:br>
+            <a:r>
+              <a:rPr lang="en-IN" dirty="0"/>
+              <a:t>        ↓</a:t>
+            </a:r>
+            <a:br>
+              <a:rPr lang="en-IN" dirty="0"/>
+            </a:br>
+            <a:r>
+              <a:rPr lang="en-IN" dirty="0"/>
+              <a:t>S3 event generated</a:t>
+            </a:r>
+            <a:br>
+              <a:rPr lang="en-IN" dirty="0"/>
+            </a:br>
+            <a:r>
+              <a:rPr lang="en-IN" dirty="0"/>
+              <a:t>        ↓</a:t>
+            </a:r>
+            <a:br>
+              <a:rPr lang="en-IN" dirty="0"/>
+            </a:br>
+            <a:r>
+              <a:rPr lang="en-IN" dirty="0"/>
+              <a:t>Lambda triggered</a:t>
+            </a:r>
+            <a:br>
+              <a:rPr lang="en-IN" dirty="0"/>
+            </a:br>
+            <a:r>
+              <a:rPr lang="en-IN" dirty="0"/>
+              <a:t>        ↓</a:t>
+            </a:r>
+            <a:br>
+              <a:rPr lang="en-IN" dirty="0"/>
+            </a:br>
+            <a:r>
+              <a:rPr lang="en-IN" dirty="0"/>
+              <a:t>Glue crawler started</a:t>
+            </a:r>
+          </a:p>
+          <a:p>
+            <a:r>
+              <a:rPr lang="en-IN" b="1" dirty="0"/>
+              <a:t>🧠 Key concept</a:t>
+            </a:r>
+          </a:p>
+          <a:p>
+            <a:r>
+              <a:rPr lang="en-IN" dirty="0"/>
+              <a:t>Lambda = works as a connection between services (event-driven compute)</a:t>
+            </a:r>
+          </a:p>
+          <a:p>
+            <a:pPr marL="0" indent="0">
+              <a:buNone/>
+            </a:pPr>
+            <a:endParaRPr lang="en-US" dirty="0"/>
+          </a:p>
+        </p:txBody>
+      </p:sp>
+    </p:spTree>
+    <p:extLst>
+      <p:ext uri="{BB962C8B-B14F-4D97-AF65-F5344CB8AC3E}">
+        <p14:creationId xmlns:p14="http://schemas.microsoft.com/office/powerpoint/2010/main" val="2166646744"/>
+      </p:ext>
+    </p:extLst>
+  </p:cSld>
+  <p:clrMapOvr>
+    <a:masterClrMapping/>
+  </p:clrMapOvr>
+</p:sld>
+</file>
+
+<file path=ppt/slides/slide37.xml><?xml version="1.0" encoding="utf-8"?>
+<p:sld xmlns:a="http://schemas.openxmlformats.org/drawingml/2006/main" xmlns:r="http://schemas.openxmlformats.org/officeDocument/2006/relationships" xmlns:p="http://schemas.openxmlformats.org/presentationml/2006/main">
+  <p:cSld>
+    <p:spTree>
+      <p:nvGrpSpPr>
+        <p:cNvPr id="1" name=""/>
+        <p:cNvGrpSpPr/>
+        <p:nvPr/>
+      </p:nvGrpSpPr>
+      <p:grpSpPr>
+        <a:xfrm>
+          <a:off x="0" y="0"/>
+          <a:ext cx="0" cy="0"/>
+          <a:chOff x="0" y="0"/>
+          <a:chExt cx="0" cy="0"/>
+        </a:xfrm>
+      </p:grpSpPr>
+      <p:sp>
+        <p:nvSpPr>
+          <p:cNvPr id="2" name="Title 1">
+            <a:extLst>
+              <a:ext uri="{FF2B5EF4-FFF2-40B4-BE49-F238E27FC236}">
+                <a16:creationId xmlns:a16="http://schemas.microsoft.com/office/drawing/2014/main" id="{9DDDD394-8B7D-D5A0-B89E-18594DD540B0}"/>
+              </a:ext>
+            </a:extLst>
+          </p:cNvPr>
+          <p:cNvSpPr>
+            <a:spLocks noGrp="1"/>
+          </p:cNvSpPr>
+          <p:nvPr>
+            <p:ph type="title"/>
+          </p:nvPr>
+        </p:nvSpPr>
+        <p:spPr/>
+        <p:txBody>
+          <a:bodyPr/>
+          <a:lstStyle/>
+          <a:p>
+            <a:r>
+              <a:rPr lang="en-IN" dirty="0"/>
+              <a:t>End-to-End Automated Flow</a:t>
+            </a:r>
+            <a:br>
+              <a:rPr lang="en-IN" dirty="0"/>
+            </a:br>
+            <a:endParaRPr lang="en-US" dirty="0"/>
+          </a:p>
+        </p:txBody>
+      </p:sp>
+      <p:sp>
+        <p:nvSpPr>
+          <p:cNvPr id="3" name="Content Placeholder 2">
+            <a:extLst>
+              <a:ext uri="{FF2B5EF4-FFF2-40B4-BE49-F238E27FC236}">
+                <a16:creationId xmlns:a16="http://schemas.microsoft.com/office/drawing/2014/main" id="{10BB4714-DB9E-764D-8882-F37B5DD37B21}"/>
+              </a:ext>
+            </a:extLst>
+          </p:cNvPr>
+          <p:cNvSpPr>
+            <a:spLocks noGrp="1"/>
+          </p:cNvSpPr>
+          <p:nvPr>
+            <p:ph idx="1"/>
+          </p:nvPr>
+        </p:nvSpPr>
+        <p:spPr/>
+        <p:txBody>
+          <a:bodyPr>
+            <a:normAutofit fontScale="85000" lnSpcReduction="20000"/>
+          </a:bodyPr>
+          <a:lstStyle/>
+          <a:p>
+            <a:r>
+              <a:rPr lang="en-IN" b="1" dirty="0"/>
+              <a:t>Full pipeline now:</a:t>
+            </a:r>
+          </a:p>
+          <a:p>
+            <a:r>
+              <a:rPr lang="en-IN" dirty="0"/>
+              <a:t>SFTP</a:t>
+            </a:r>
+            <a:br>
+              <a:rPr lang="en-IN" dirty="0"/>
+            </a:br>
+            <a:r>
+              <a:rPr lang="en-IN" dirty="0"/>
+              <a:t>  ↓</a:t>
+            </a:r>
+            <a:br>
+              <a:rPr lang="en-IN" dirty="0"/>
+            </a:br>
+            <a:r>
+              <a:rPr lang="en-IN" dirty="0"/>
+              <a:t>EC2 (Python job)</a:t>
+            </a:r>
+            <a:br>
+              <a:rPr lang="en-IN" dirty="0"/>
+            </a:br>
+            <a:r>
+              <a:rPr lang="en-IN" dirty="0"/>
+              <a:t>  ↓</a:t>
+            </a:r>
+            <a:br>
+              <a:rPr lang="en-IN" dirty="0"/>
+            </a:br>
+            <a:r>
+              <a:rPr lang="en-IN" dirty="0"/>
+              <a:t>S3 (partitioned parquet)</a:t>
+            </a:r>
+            <a:br>
+              <a:rPr lang="en-IN" dirty="0"/>
+            </a:br>
+            <a:r>
+              <a:rPr lang="en-IN" dirty="0"/>
+              <a:t>  ↓</a:t>
+            </a:r>
+            <a:br>
+              <a:rPr lang="en-IN" dirty="0"/>
+            </a:br>
+            <a:r>
+              <a:rPr lang="en-IN" dirty="0"/>
+              <a:t>S3 event trigger</a:t>
+            </a:r>
+            <a:br>
+              <a:rPr lang="en-IN" dirty="0"/>
+            </a:br>
+            <a:r>
+              <a:rPr lang="en-IN" dirty="0"/>
+              <a:t>  ↓</a:t>
+            </a:r>
+            <a:br>
+              <a:rPr lang="en-IN" dirty="0"/>
+            </a:br>
+            <a:r>
+              <a:rPr lang="en-IN" dirty="0"/>
+              <a:t>Lambda</a:t>
+            </a:r>
+            <a:br>
+              <a:rPr lang="en-IN" dirty="0"/>
+            </a:br>
+            <a:r>
+              <a:rPr lang="en-IN" dirty="0"/>
+              <a:t>  ↓</a:t>
+            </a:r>
+            <a:br>
+              <a:rPr lang="en-IN" dirty="0"/>
+            </a:br>
+            <a:r>
+              <a:rPr lang="en-IN" dirty="0"/>
+              <a:t>Glue crawler</a:t>
+            </a:r>
+            <a:br>
+              <a:rPr lang="en-IN" dirty="0"/>
+            </a:br>
+            <a:r>
+              <a:rPr lang="en-IN" dirty="0"/>
+              <a:t>  ↓</a:t>
+            </a:r>
+            <a:br>
+              <a:rPr lang="en-IN" dirty="0"/>
+            </a:br>
+            <a:r>
+              <a:rPr lang="en-IN" dirty="0"/>
+              <a:t>Glue </a:t>
+            </a:r>
+            <a:r>
+              <a:rPr lang="en-IN" dirty="0" err="1"/>
+              <a:t>catalog</a:t>
+            </a:r>
+            <a:r>
+              <a:rPr lang="en-IN" dirty="0"/>
+              <a:t> updated</a:t>
+            </a:r>
+            <a:br>
+              <a:rPr lang="en-IN" dirty="0"/>
+            </a:br>
+            <a:r>
+              <a:rPr lang="en-IN" dirty="0"/>
+              <a:t>  ↓</a:t>
+            </a:r>
+            <a:br>
+              <a:rPr lang="en-IN" dirty="0"/>
+            </a:br>
+            <a:r>
+              <a:rPr lang="en-IN" dirty="0"/>
+              <a:t>Athena ready to query</a:t>
+            </a:r>
+          </a:p>
+          <a:p>
+            <a:endParaRPr lang="en-US" dirty="0"/>
+          </a:p>
+        </p:txBody>
+      </p:sp>
+    </p:spTree>
+    <p:extLst>
+      <p:ext uri="{BB962C8B-B14F-4D97-AF65-F5344CB8AC3E}">
+        <p14:creationId xmlns:p14="http://schemas.microsoft.com/office/powerpoint/2010/main" val="3160201816"/>
+      </p:ext>
+    </p:extLst>
+  </p:cSld>
+  <p:clrMapOvr>
+    <a:masterClrMapping/>
+  </p:clrMapOvr>
+</p:sld>
+</file>
+
+<file path=ppt/slides/slide38.xml><?xml version="1.0" encoding="utf-8"?>
+<p:sld xmlns:a="http://schemas.openxmlformats.org/drawingml/2006/main" xmlns:r="http://schemas.openxmlformats.org/officeDocument/2006/relationships" xmlns:p="http://schemas.openxmlformats.org/presentationml/2006/main">
+  <p:cSld>
+    <p:spTree>
+      <p:nvGrpSpPr>
+        <p:cNvPr id="1" name=""/>
+        <p:cNvGrpSpPr/>
+        <p:nvPr/>
+      </p:nvGrpSpPr>
+      <p:grpSpPr>
+        <a:xfrm>
+          <a:off x="0" y="0"/>
+          <a:ext cx="0" cy="0"/>
+          <a:chOff x="0" y="0"/>
+          <a:chExt cx="0" cy="0"/>
+        </a:xfrm>
+      </p:grpSpPr>
+      <p:sp>
+        <p:nvSpPr>
+          <p:cNvPr id="2" name="Title 1">
+            <a:extLst>
+              <a:ext uri="{FF2B5EF4-FFF2-40B4-BE49-F238E27FC236}">
+                <a16:creationId xmlns:a16="http://schemas.microsoft.com/office/drawing/2014/main" id="{BBF548BE-E207-580B-558A-EE9856B269A4}"/>
+              </a:ext>
+            </a:extLst>
+          </p:cNvPr>
+          <p:cNvSpPr>
+            <a:spLocks noGrp="1"/>
+          </p:cNvSpPr>
+          <p:nvPr>
+            <p:ph type="title"/>
+          </p:nvPr>
+        </p:nvSpPr>
+        <p:spPr/>
+        <p:txBody>
+          <a:bodyPr/>
+          <a:lstStyle/>
+          <a:p>
+            <a:r>
+              <a:rPr lang="en-US" dirty="0"/>
+              <a:t>Next Step</a:t>
+            </a:r>
+          </a:p>
+        </p:txBody>
+      </p:sp>
+      <p:sp>
+        <p:nvSpPr>
+          <p:cNvPr id="3" name="Content Placeholder 2">
+            <a:extLst>
+              <a:ext uri="{FF2B5EF4-FFF2-40B4-BE49-F238E27FC236}">
+                <a16:creationId xmlns:a16="http://schemas.microsoft.com/office/drawing/2014/main" id="{5CC08C80-1577-2ECB-B828-5293B24139DC}"/>
+              </a:ext>
+            </a:extLst>
+          </p:cNvPr>
+          <p:cNvSpPr>
+            <a:spLocks noGrp="1"/>
+          </p:cNvSpPr>
+          <p:nvPr>
+            <p:ph idx="1"/>
+          </p:nvPr>
+        </p:nvSpPr>
+        <p:spPr/>
+        <p:txBody>
+          <a:bodyPr>
+            <a:normAutofit/>
+          </a:bodyPr>
+          <a:lstStyle/>
+          <a:p>
+            <a:r>
+              <a:rPr lang="en-IN" b="1" dirty="0"/>
+              <a:t>Multiple crawler runs</a:t>
+            </a:r>
+          </a:p>
+          <a:p>
+            <a:pPr lvl="1"/>
+            <a:r>
+              <a:rPr lang="en-IN" dirty="0"/>
+              <a:t>Every file triggers Lambda → crawler </a:t>
+            </a:r>
+          </a:p>
+          <a:p>
+            <a:pPr lvl="1"/>
+            <a:r>
+              <a:rPr lang="en-IN" dirty="0"/>
+              <a:t>Inefficient (but okay for now)</a:t>
+            </a:r>
+          </a:p>
+          <a:p>
+            <a:pPr marL="0" indent="0">
+              <a:buNone/>
+            </a:pPr>
+            <a:endParaRPr lang="en-US" dirty="0"/>
+          </a:p>
+          <a:p>
+            <a:pPr marL="0" indent="0">
+              <a:buNone/>
+            </a:pPr>
+            <a:r>
+              <a:rPr lang="en-US" dirty="0"/>
+              <a:t>Next steps:</a:t>
+            </a:r>
+          </a:p>
+          <a:p>
+            <a:pPr marL="0" indent="0">
+              <a:buNone/>
+            </a:pPr>
+            <a:r>
+              <a:rPr lang="en-US" dirty="0"/>
+              <a:t>1. Diff between </a:t>
+            </a:r>
+          </a:p>
+          <a:p>
+            <a:pPr marL="228600" lvl="1" indent="0">
+              <a:buNone/>
+            </a:pPr>
+            <a:r>
+              <a:rPr lang="en-US" dirty="0"/>
+              <a:t>Run only the Glue –partition adder instead of glue crawler vs </a:t>
+            </a:r>
+            <a:r>
+              <a:rPr lang="en-IN" dirty="0"/>
+              <a:t>Remove crawler → use partition projection (advanced)?</a:t>
+            </a:r>
+            <a:endParaRPr lang="en-US" dirty="0"/>
+          </a:p>
+          <a:p>
+            <a:pPr marL="0" indent="0">
+              <a:buNone/>
+            </a:pPr>
+            <a:r>
+              <a:rPr lang="en-US" dirty="0"/>
+              <a:t>2. Run glue crawler only after the batch job(multiple files) is completed</a:t>
+            </a:r>
+          </a:p>
+        </p:txBody>
+      </p:sp>
+    </p:spTree>
+    <p:extLst>
+      <p:ext uri="{BB962C8B-B14F-4D97-AF65-F5344CB8AC3E}">
+        <p14:creationId xmlns:p14="http://schemas.microsoft.com/office/powerpoint/2010/main" val="406980739"/>
       </p:ext>
     </p:extLst>
   </p:cSld>

--- a/data_engineering_workshop.pptx
+++ b/data_engineering_workshop.pptx
@@ -317,7 +317,7 @@
           <a:p>
             <a:fld id="{567B50E4-2343-4B20-80BE-1605C97DFB16}" type="datetime1">
               <a:rPr lang="en-US" smtClean="0"/>
-              <a:t>4/11/26</a:t>
+              <a:t>4/13/26</a:t>
             </a:fld>
             <a:endParaRPr lang="en-US"/>
           </a:p>
@@ -614,7 +614,7 @@
           <a:p>
             <a:fld id="{CE6CA204-B091-40ED-8158-331EE628B522}" type="datetime1">
               <a:rPr lang="en-US" smtClean="0"/>
-              <a:t>4/11/26</a:t>
+              <a:t>4/13/26</a:t>
             </a:fld>
             <a:endParaRPr lang="en-US" dirty="0"/>
           </a:p>
@@ -852,7 +852,7 @@
           <a:p>
             <a:fld id="{23692F09-9D88-4105-92F6-7298804EAA90}" type="datetime1">
               <a:rPr lang="en-US" smtClean="0"/>
-              <a:t>4/11/26</a:t>
+              <a:t>4/13/26</a:t>
             </a:fld>
             <a:endParaRPr lang="en-US"/>
           </a:p>
@@ -1069,7 +1069,7 @@
           <a:p>
             <a:fld id="{33744F96-061D-4D71-97A2-2371A43FDE7C}" type="datetime1">
               <a:rPr lang="en-US" smtClean="0"/>
-              <a:t>4/11/26</a:t>
+              <a:t>4/13/26</a:t>
             </a:fld>
             <a:endParaRPr lang="en-US"/>
           </a:p>
@@ -1286,7 +1286,7 @@
           <a:p>
             <a:fld id="{4C5FE133-02A7-439F-9131-2680F754099D}" type="datetime1">
               <a:rPr lang="en-US" smtClean="0"/>
-              <a:t>4/11/26</a:t>
+              <a:t>4/13/26</a:t>
             </a:fld>
             <a:endParaRPr lang="en-US"/>
           </a:p>
@@ -1503,7 +1503,7 @@
           <a:p>
             <a:fld id="{D91BF7DD-C7D0-4333-B18D-CCAF5427F9DD}" type="datetime1">
               <a:rPr lang="en-US" smtClean="0"/>
-              <a:t>4/11/26</a:t>
+              <a:t>4/13/26</a:t>
             </a:fld>
             <a:endParaRPr lang="en-US"/>
           </a:p>
@@ -1720,7 +1720,7 @@
           <a:p>
             <a:fld id="{30415979-091A-4302-A385-56FC1CE52E32}" type="datetime1">
               <a:rPr lang="en-US" smtClean="0"/>
-              <a:t>4/11/26</a:t>
+              <a:t>4/13/26</a:t>
             </a:fld>
             <a:endParaRPr lang="en-US"/>
           </a:p>
@@ -1983,7 +1983,7 @@
           <a:p>
             <a:fld id="{7836D543-476D-434F-B209-1A114B2E3F04}" type="datetime1">
               <a:rPr lang="en-US" smtClean="0"/>
-              <a:t>4/11/26</a:t>
+              <a:t>4/13/26</a:t>
             </a:fld>
             <a:endParaRPr lang="en-US"/>
           </a:p>
@@ -2241,7 +2241,7 @@
           <a:p>
             <a:fld id="{83DD0F20-7689-42E6-8664-6AA00B79F132}" type="datetime1">
               <a:rPr lang="en-US" smtClean="0"/>
-              <a:t>4/11/26</a:t>
+              <a:t>4/13/26</a:t>
             </a:fld>
             <a:endParaRPr lang="en-US"/>
           </a:p>
@@ -2514,7 +2514,7 @@
           <a:p>
             <a:fld id="{30F2F577-5BDA-4749-9F3F-0D340DC0D6A8}" type="datetime1">
               <a:rPr lang="en-US" smtClean="0"/>
-              <a:t>4/11/26</a:t>
+              <a:t>4/13/26</a:t>
             </a:fld>
             <a:endParaRPr lang="en-US"/>
           </a:p>
@@ -2772,7 +2772,7 @@
           <a:p>
             <a:fld id="{AC9378AD-A6D7-4162-BB5C-47C49B2E145B}" type="datetime1">
               <a:rPr lang="en-US" smtClean="0"/>
-              <a:t>4/11/26</a:t>
+              <a:t>4/13/26</a:t>
             </a:fld>
             <a:endParaRPr lang="en-US"/>
           </a:p>
@@ -2983,7 +2983,7 @@
           <a:p>
             <a:fld id="{C02DE44A-7CD8-4860-9BDC-2BE4C911F6D0}" type="datetime1">
               <a:rPr lang="en-US" smtClean="0"/>
-              <a:t>4/11/26</a:t>
+              <a:t>4/13/26</a:t>
             </a:fld>
             <a:endParaRPr lang="en-US"/>
           </a:p>
@@ -3255,7 +3255,7 @@
           <a:p>
             <a:fld id="{C67B65D3-547A-48A8-9F1F-13ED0B55ACC6}" type="datetime1">
               <a:rPr lang="en-US" smtClean="0"/>
-              <a:t>4/11/26</a:t>
+              <a:t>4/13/26</a:t>
             </a:fld>
             <a:endParaRPr lang="en-US"/>
           </a:p>
@@ -3471,7 +3471,7 @@
           <a:p>
             <a:fld id="{76A7CFE7-E645-4439-AA6B-DA8CF856D63E}" type="datetime1">
               <a:rPr lang="en-US" smtClean="0"/>
-              <a:t>4/11/26</a:t>
+              <a:t>4/13/26</a:t>
             </a:fld>
             <a:endParaRPr lang="en-US"/>
           </a:p>
@@ -3823,7 +3823,7 @@
           <a:p>
             <a:fld id="{E8B2C0DB-994F-48B0-91F4-5F06C3B86E32}" type="datetime1">
               <a:rPr lang="en-US" smtClean="0"/>
-              <a:t>4/11/26</a:t>
+              <a:t>4/13/26</a:t>
             </a:fld>
             <a:endParaRPr lang="en-US"/>
           </a:p>
@@ -4043,7 +4043,7 @@
           <a:p>
             <a:fld id="{D3F6A089-BE3E-4BB0-98EE-FDF712FF3613}" type="datetime1">
               <a:rPr lang="en-US" smtClean="0"/>
-              <a:t>4/11/26</a:t>
+              <a:t>4/13/26</a:t>
             </a:fld>
             <a:endParaRPr lang="en-US"/>
           </a:p>
@@ -4388,7 +4388,7 @@
           <a:p>
             <a:fld id="{AC101298-AE91-4071-9C72-5A98117ABE14}" type="datetime1">
               <a:rPr lang="en-US" smtClean="0"/>
-              <a:t>4/11/26</a:t>
+              <a:t>4/13/26</a:t>
             </a:fld>
             <a:endParaRPr lang="en-US"/>
           </a:p>
@@ -4615,7 +4615,7 @@
           <a:p>
             <a:fld id="{EABE4333-790C-44CD-B503-F52418ED809A}" type="datetime1">
               <a:rPr lang="en-US" smtClean="0"/>
-              <a:t>4/11/26</a:t>
+              <a:t>4/13/26</a:t>
             </a:fld>
             <a:endParaRPr lang="en-US"/>
           </a:p>
@@ -4986,7 +4986,7 @@
           <a:p>
             <a:fld id="{D2397CCD-8E49-4379-8DCB-9F17CAEDFC10}" type="datetime1">
               <a:rPr lang="en-US" smtClean="0"/>
-              <a:t>4/11/26</a:t>
+              <a:t>4/13/26</a:t>
             </a:fld>
             <a:endParaRPr lang="en-US"/>
           </a:p>
@@ -5193,7 +5193,7 @@
           <a:p>
             <a:fld id="{AA6146F6-C62B-441B-BAD2-D550454B4D53}" type="datetime1">
               <a:rPr lang="en-US" smtClean="0"/>
-              <a:t>4/11/26</a:t>
+              <a:t>4/13/26</a:t>
             </a:fld>
             <a:endParaRPr lang="en-US"/>
           </a:p>
@@ -5485,7 +5485,7 @@
           <a:p>
             <a:fld id="{A0383A68-D563-4FD5-B11F-54F8D5F1E37F}" type="datetime1">
               <a:rPr lang="en-US" smtClean="0"/>
-              <a:t>4/11/26</a:t>
+              <a:t>4/13/26</a:t>
             </a:fld>
             <a:endParaRPr lang="en-US"/>
           </a:p>
@@ -5782,7 +5782,7 @@
           <a:p>
             <a:fld id="{3148FABB-02FF-476F-AB37-BDD0E354E780}" type="datetime1">
               <a:rPr lang="en-US" smtClean="0"/>
-              <a:t>4/11/26</a:t>
+              <a:t>4/13/26</a:t>
             </a:fld>
             <a:endParaRPr lang="en-US"/>
           </a:p>
@@ -6140,7 +6140,7 @@
           <a:p>
             <a:fld id="{E38EAEAF-D16E-446F-97F9-D23FB245CB45}" type="datetime1">
               <a:rPr lang="en-US" smtClean="0"/>
-              <a:t>4/11/26</a:t>
+              <a:t>4/13/26</a:t>
             </a:fld>
             <a:endParaRPr lang="en-US"/>
           </a:p>
@@ -6398,7 +6398,7 @@
           <a:p>
             <a:fld id="{BCA428D3-736A-4038-886C-8BF662AA2745}" type="datetime1">
               <a:rPr lang="en-US" smtClean="0"/>
-              <a:t>4/11/26</a:t>
+              <a:t>4/13/26</a:t>
             </a:fld>
             <a:endParaRPr lang="en-US"/>
           </a:p>
@@ -6662,7 +6662,7 @@
           <a:p>
             <a:fld id="{1ED1DDEB-9B85-4E99-8A3D-ABE66C6280C3}" type="datetime1">
               <a:rPr lang="en-US" smtClean="0"/>
-              <a:t>4/11/26</a:t>
+              <a:t>4/13/26</a:t>
             </a:fld>
             <a:endParaRPr lang="en-US"/>
           </a:p>
@@ -6926,7 +6926,7 @@
           <a:p>
             <a:fld id="{A7A65DCA-443F-4667-9ED1-418507CE45A8}" type="datetime1">
               <a:rPr lang="en-US" smtClean="0"/>
-              <a:t>4/11/26</a:t>
+              <a:t>4/13/26</a:t>
             </a:fld>
             <a:endParaRPr lang="en-US"/>
           </a:p>
@@ -7146,7 +7146,7 @@
           <a:p>
             <a:fld id="{8CA1557D-4816-44D0-B6EE-6CAC6E30B54D}" type="datetime1">
               <a:rPr lang="en-US" smtClean="0"/>
-              <a:t>4/11/26</a:t>
+              <a:t>4/13/26</a:t>
             </a:fld>
             <a:endParaRPr lang="en-US"/>
           </a:p>
@@ -7362,7 +7362,7 @@
           <a:p>
             <a:fld id="{651F872E-5ED2-46B0-83A4-0C1AF0E0D91C}" type="datetime1">
               <a:rPr lang="en-US" smtClean="0"/>
-              <a:t>4/11/26</a:t>
+              <a:t>4/13/26</a:t>
             </a:fld>
             <a:endParaRPr lang="en-US"/>
           </a:p>
@@ -7633,7 +7633,7 @@
           <a:p>
             <a:fld id="{C6218575-0C6E-47B4-936E-32183810D7BF}" type="datetime1">
               <a:rPr lang="en-US" smtClean="0"/>
-              <a:t>4/11/26</a:t>
+              <a:t>4/13/26</a:t>
             </a:fld>
             <a:endParaRPr lang="en-US"/>
           </a:p>
@@ -7782,7 +7782,7 @@
           <a:p>
             <a:fld id="{91C29FB5-1C86-423F-AEAA-2683840666C3}" type="datetime1">
               <a:rPr lang="en-US" smtClean="0"/>
-              <a:t>4/11/26</a:t>
+              <a:t>4/13/26</a:t>
             </a:fld>
             <a:endParaRPr lang="en-US"/>
           </a:p>
@@ -8032,7 +8032,7 @@
           <a:p>
             <a:fld id="{111CCB4E-88AF-46AC-B7C5-30308F179659}" type="datetime1">
               <a:rPr lang="en-US" smtClean="0"/>
-              <a:t>4/11/26</a:t>
+              <a:t>4/13/26</a:t>
             </a:fld>
             <a:endParaRPr lang="en-US"/>
           </a:p>
@@ -8282,7 +8282,7 @@
           <a:p>
             <a:fld id="{5BA915B6-CC2A-4462-A7E5-B3080DF8F97D}" type="datetime1">
               <a:rPr lang="en-US" smtClean="0"/>
-              <a:t>4/11/26</a:t>
+              <a:t>4/13/26</a:t>
             </a:fld>
             <a:endParaRPr lang="en-US"/>
           </a:p>
@@ -8597,7 +8597,7 @@
           <a:p>
             <a:fld id="{506188F7-A494-4EEB-A53D-2B97B1D4CD3C}" type="datetime1">
               <a:rPr lang="en-US" smtClean="0"/>
-              <a:t>4/11/26</a:t>
+              <a:t>4/13/26</a:t>
             </a:fld>
             <a:endParaRPr lang="en-US"/>
           </a:p>
@@ -8846,7 +8846,7 @@
           <a:p>
             <a:fld id="{782E7A21-5BA8-4C4C-9705-3A1EA342AD8A}" type="datetime1">
               <a:rPr lang="en-US" smtClean="0"/>
-              <a:t>4/11/26</a:t>
+              <a:t>4/13/26</a:t>
             </a:fld>
             <a:endParaRPr lang="en-US"/>
           </a:p>
@@ -9127,7 +9127,7 @@
           <a:p>
             <a:fld id="{9F406BC0-1562-42E5-89A2-925CA193C8A6}" type="datetime1">
               <a:rPr lang="en-US" smtClean="0"/>
-              <a:t>4/11/26</a:t>
+              <a:t>4/13/26</a:t>
             </a:fld>
             <a:endParaRPr lang="en-US"/>
           </a:p>
@@ -9341,7 +9341,7 @@
           <a:p>
             <a:fld id="{507F376A-778D-45CF-8340-DB03B2DA6A3E}" type="datetime1">
               <a:rPr lang="en-US" smtClean="0"/>
-              <a:t>4/11/26</a:t>
+              <a:t>4/13/26</a:t>
             </a:fld>
             <a:endParaRPr lang="en-US"/>
           </a:p>
@@ -9614,7 +9614,7 @@
           <a:p>
             <a:fld id="{8B9DFF5A-622E-43FE-9EE9-BAAB78AB2046}" type="datetime1">
               <a:rPr lang="en-US" smtClean="0"/>
-              <a:t>4/11/26</a:t>
+              <a:t>4/13/26</a:t>
             </a:fld>
             <a:endParaRPr lang="en-US"/>
           </a:p>
@@ -10039,7 +10039,7 @@
           <a:p>
             <a:fld id="{FF55C09E-FF30-4AA0-A227-171955622259}" type="datetime1">
               <a:rPr lang="en-US" smtClean="0"/>
-              <a:t>4/11/26</a:t>
+              <a:t>4/13/26</a:t>
             </a:fld>
             <a:endParaRPr lang="en-US"/>
           </a:p>
@@ -10183,7 +10183,7 @@
           <a:p>
             <a:fld id="{97B279FF-407B-4B41-9E69-DE66ED04A328}" type="datetime1">
               <a:rPr lang="en-US" smtClean="0"/>
-              <a:t>4/11/26</a:t>
+              <a:t>4/13/26</a:t>
             </a:fld>
             <a:endParaRPr lang="en-US"/>
           </a:p>
@@ -10299,7 +10299,7 @@
           <a:p>
             <a:fld id="{A803E812-757D-4139-AF81-227C72D4B544}" type="datetime1">
               <a:rPr lang="en-US" smtClean="0"/>
-              <a:t>4/11/26</a:t>
+              <a:t>4/13/26</a:t>
             </a:fld>
             <a:endParaRPr lang="en-US"/>
           </a:p>
@@ -10607,7 +10607,7 @@
           <a:p>
             <a:fld id="{07D6A7E1-C424-43A5-938A-12DEC0A1D59D}" type="datetime1">
               <a:rPr lang="en-US" smtClean="0"/>
-              <a:t>4/11/26</a:t>
+              <a:t>4/13/26</a:t>
             </a:fld>
             <a:endParaRPr lang="en-US"/>
           </a:p>
@@ -10914,7 +10914,7 @@
           <a:p>
             <a:fld id="{807C4FC2-B89B-4919-A96B-662A3584681C}" type="datetime1">
               <a:rPr lang="en-US" smtClean="0"/>
-              <a:t>4/11/26</a:t>
+              <a:t>4/13/26</a:t>
             </a:fld>
             <a:endParaRPr lang="en-US"/>
           </a:p>
@@ -11157,7 +11157,7 @@
           <a:p>
             <a:fld id="{7C24BE51-D660-433D-AABA-154BE028E64E}" type="datetime1">
               <a:rPr lang="en-US" smtClean="0"/>
-              <a:t>4/11/26</a:t>
+              <a:t>4/13/26</a:t>
             </a:fld>
             <a:endParaRPr lang="en-US"/>
           </a:p>
@@ -11402,7 +11402,7 @@
           <a:p>
             <a:fld id="{DB61F76E-6064-4431-B5C4-29A511725BCF}" type="datetime1">
               <a:rPr lang="en-US" smtClean="0"/>
-              <a:t>4/11/26</a:t>
+              <a:t>4/13/26</a:t>
             </a:fld>
             <a:endParaRPr lang="en-US"/>
           </a:p>
@@ -11599,7 +11599,7 @@
           <a:p>
             <a:fld id="{1CBE73BE-5F1F-40EF-8F67-E3F24D65884D}" type="datetime1">
               <a:rPr lang="en-US" smtClean="0"/>
-              <a:t>4/11/26</a:t>
+              <a:t>4/13/26</a:t>
             </a:fld>
             <a:endParaRPr lang="en-US"/>
           </a:p>
@@ -11796,7 +11796,7 @@
           <a:p>
             <a:fld id="{3C868EF1-668D-4AD0-8652-1F3B3622EDC2}" type="datetime1">
               <a:rPr lang="en-US" smtClean="0"/>
-              <a:t>4/11/26</a:t>
+              <a:t>4/13/26</a:t>
             </a:fld>
             <a:endParaRPr lang="en-US"/>
           </a:p>
@@ -12023,7 +12023,7 @@
           <a:p>
             <a:fld id="{1E95609F-9B5B-4E29-8DB1-457A85E01A27}" type="datetime1">
               <a:rPr lang="en-US" smtClean="0"/>
-              <a:t>4/11/26</a:t>
+              <a:t>4/13/26</a:t>
             </a:fld>
             <a:endParaRPr lang="en-US"/>
           </a:p>
@@ -12184,7 +12184,7 @@
           <a:p>
             <a:fld id="{16A0DE37-B9D6-425C-B79B-6C6DFFBD0DA2}" type="datetime1">
               <a:rPr lang="en-US" smtClean="0"/>
-              <a:t>4/11/26</a:t>
+              <a:t>4/13/26</a:t>
             </a:fld>
             <a:endParaRPr lang="en-US"/>
           </a:p>
@@ -12429,7 +12429,7 @@
           <a:p>
             <a:fld id="{1045B0EE-4023-4E3C-8875-10AA631453CF}" type="datetime1">
               <a:rPr lang="en-US" smtClean="0"/>
-              <a:t>4/11/26</a:t>
+              <a:t>4/13/26</a:t>
             </a:fld>
             <a:endParaRPr lang="en-US"/>
           </a:p>
@@ -12671,7 +12671,7 @@
           <a:p>
             <a:fld id="{5EE9E671-1C83-40F7-9D33-FE8AAC7F721F}" type="datetime1">
               <a:rPr lang="en-US" smtClean="0"/>
-              <a:t>4/11/26</a:t>
+              <a:t>4/13/26</a:t>
             </a:fld>
             <a:endParaRPr lang="en-US"/>
           </a:p>

--- a/data_engineering_workshop.pptx
+++ b/data_engineering_workshop.pptx
@@ -40,9 +40,10 @@
     <p:sldId id="288" r:id="rId34"/>
     <p:sldId id="289" r:id="rId35"/>
     <p:sldId id="291" r:id="rId36"/>
-    <p:sldId id="292" r:id="rId37"/>
-    <p:sldId id="293" r:id="rId38"/>
-    <p:sldId id="294" r:id="rId39"/>
+    <p:sldId id="295" r:id="rId37"/>
+    <p:sldId id="292" r:id="rId38"/>
+    <p:sldId id="293" r:id="rId39"/>
+    <p:sldId id="294" r:id="rId40"/>
   </p:sldIdLst>
   <p:sldSz cx="12192000" cy="6858000"/>
   <p:notesSz cx="6858000" cy="9144000"/>
@@ -317,7 +318,7 @@
           <a:p>
             <a:fld id="{567B50E4-2343-4B20-80BE-1605C97DFB16}" type="datetime1">
               <a:rPr lang="en-US" smtClean="0"/>
-              <a:t>4/13/26</a:t>
+              <a:t>4/20/26</a:t>
             </a:fld>
             <a:endParaRPr lang="en-US"/>
           </a:p>
@@ -614,7 +615,7 @@
           <a:p>
             <a:fld id="{CE6CA204-B091-40ED-8158-331EE628B522}" type="datetime1">
               <a:rPr lang="en-US" smtClean="0"/>
-              <a:t>4/13/26</a:t>
+              <a:t>4/20/26</a:t>
             </a:fld>
             <a:endParaRPr lang="en-US" dirty="0"/>
           </a:p>
@@ -852,7 +853,7 @@
           <a:p>
             <a:fld id="{23692F09-9D88-4105-92F6-7298804EAA90}" type="datetime1">
               <a:rPr lang="en-US" smtClean="0"/>
-              <a:t>4/13/26</a:t>
+              <a:t>4/20/26</a:t>
             </a:fld>
             <a:endParaRPr lang="en-US"/>
           </a:p>
@@ -1069,7 +1070,7 @@
           <a:p>
             <a:fld id="{33744F96-061D-4D71-97A2-2371A43FDE7C}" type="datetime1">
               <a:rPr lang="en-US" smtClean="0"/>
-              <a:t>4/13/26</a:t>
+              <a:t>4/20/26</a:t>
             </a:fld>
             <a:endParaRPr lang="en-US"/>
           </a:p>
@@ -1286,7 +1287,7 @@
           <a:p>
             <a:fld id="{4C5FE133-02A7-439F-9131-2680F754099D}" type="datetime1">
               <a:rPr lang="en-US" smtClean="0"/>
-              <a:t>4/13/26</a:t>
+              <a:t>4/20/26</a:t>
             </a:fld>
             <a:endParaRPr lang="en-US"/>
           </a:p>
@@ -1503,7 +1504,7 @@
           <a:p>
             <a:fld id="{D91BF7DD-C7D0-4333-B18D-CCAF5427F9DD}" type="datetime1">
               <a:rPr lang="en-US" smtClean="0"/>
-              <a:t>4/13/26</a:t>
+              <a:t>4/20/26</a:t>
             </a:fld>
             <a:endParaRPr lang="en-US"/>
           </a:p>
@@ -1720,7 +1721,7 @@
           <a:p>
             <a:fld id="{30415979-091A-4302-A385-56FC1CE52E32}" type="datetime1">
               <a:rPr lang="en-US" smtClean="0"/>
-              <a:t>4/13/26</a:t>
+              <a:t>4/20/26</a:t>
             </a:fld>
             <a:endParaRPr lang="en-US"/>
           </a:p>
@@ -1983,7 +1984,7 @@
           <a:p>
             <a:fld id="{7836D543-476D-434F-B209-1A114B2E3F04}" type="datetime1">
               <a:rPr lang="en-US" smtClean="0"/>
-              <a:t>4/13/26</a:t>
+              <a:t>4/20/26</a:t>
             </a:fld>
             <a:endParaRPr lang="en-US"/>
           </a:p>
@@ -2241,7 +2242,7 @@
           <a:p>
             <a:fld id="{83DD0F20-7689-42E6-8664-6AA00B79F132}" type="datetime1">
               <a:rPr lang="en-US" smtClean="0"/>
-              <a:t>4/13/26</a:t>
+              <a:t>4/20/26</a:t>
             </a:fld>
             <a:endParaRPr lang="en-US"/>
           </a:p>
@@ -2514,7 +2515,7 @@
           <a:p>
             <a:fld id="{30F2F577-5BDA-4749-9F3F-0D340DC0D6A8}" type="datetime1">
               <a:rPr lang="en-US" smtClean="0"/>
-              <a:t>4/13/26</a:t>
+              <a:t>4/20/26</a:t>
             </a:fld>
             <a:endParaRPr lang="en-US"/>
           </a:p>
@@ -2772,7 +2773,7 @@
           <a:p>
             <a:fld id="{AC9378AD-A6D7-4162-BB5C-47C49B2E145B}" type="datetime1">
               <a:rPr lang="en-US" smtClean="0"/>
-              <a:t>4/13/26</a:t>
+              <a:t>4/20/26</a:t>
             </a:fld>
             <a:endParaRPr lang="en-US"/>
           </a:p>
@@ -2983,7 +2984,7 @@
           <a:p>
             <a:fld id="{C02DE44A-7CD8-4860-9BDC-2BE4C911F6D0}" type="datetime1">
               <a:rPr lang="en-US" smtClean="0"/>
-              <a:t>4/13/26</a:t>
+              <a:t>4/20/26</a:t>
             </a:fld>
             <a:endParaRPr lang="en-US"/>
           </a:p>
@@ -3255,7 +3256,7 @@
           <a:p>
             <a:fld id="{C67B65D3-547A-48A8-9F1F-13ED0B55ACC6}" type="datetime1">
               <a:rPr lang="en-US" smtClean="0"/>
-              <a:t>4/13/26</a:t>
+              <a:t>4/20/26</a:t>
             </a:fld>
             <a:endParaRPr lang="en-US"/>
           </a:p>
@@ -3471,7 +3472,7 @@
           <a:p>
             <a:fld id="{76A7CFE7-E645-4439-AA6B-DA8CF856D63E}" type="datetime1">
               <a:rPr lang="en-US" smtClean="0"/>
-              <a:t>4/13/26</a:t>
+              <a:t>4/20/26</a:t>
             </a:fld>
             <a:endParaRPr lang="en-US"/>
           </a:p>
@@ -3823,7 +3824,7 @@
           <a:p>
             <a:fld id="{E8B2C0DB-994F-48B0-91F4-5F06C3B86E32}" type="datetime1">
               <a:rPr lang="en-US" smtClean="0"/>
-              <a:t>4/13/26</a:t>
+              <a:t>4/20/26</a:t>
             </a:fld>
             <a:endParaRPr lang="en-US"/>
           </a:p>
@@ -4043,7 +4044,7 @@
           <a:p>
             <a:fld id="{D3F6A089-BE3E-4BB0-98EE-FDF712FF3613}" type="datetime1">
               <a:rPr lang="en-US" smtClean="0"/>
-              <a:t>4/13/26</a:t>
+              <a:t>4/20/26</a:t>
             </a:fld>
             <a:endParaRPr lang="en-US"/>
           </a:p>
@@ -4388,7 +4389,7 @@
           <a:p>
             <a:fld id="{AC101298-AE91-4071-9C72-5A98117ABE14}" type="datetime1">
               <a:rPr lang="en-US" smtClean="0"/>
-              <a:t>4/13/26</a:t>
+              <a:t>4/20/26</a:t>
             </a:fld>
             <a:endParaRPr lang="en-US"/>
           </a:p>
@@ -4615,7 +4616,7 @@
           <a:p>
             <a:fld id="{EABE4333-790C-44CD-B503-F52418ED809A}" type="datetime1">
               <a:rPr lang="en-US" smtClean="0"/>
-              <a:t>4/13/26</a:t>
+              <a:t>4/20/26</a:t>
             </a:fld>
             <a:endParaRPr lang="en-US"/>
           </a:p>
@@ -4986,7 +4987,7 @@
           <a:p>
             <a:fld id="{D2397CCD-8E49-4379-8DCB-9F17CAEDFC10}" type="datetime1">
               <a:rPr lang="en-US" smtClean="0"/>
-              <a:t>4/13/26</a:t>
+              <a:t>4/20/26</a:t>
             </a:fld>
             <a:endParaRPr lang="en-US"/>
           </a:p>
@@ -5193,7 +5194,7 @@
           <a:p>
             <a:fld id="{AA6146F6-C62B-441B-BAD2-D550454B4D53}" type="datetime1">
               <a:rPr lang="en-US" smtClean="0"/>
-              <a:t>4/13/26</a:t>
+              <a:t>4/20/26</a:t>
             </a:fld>
             <a:endParaRPr lang="en-US"/>
           </a:p>
@@ -5485,7 +5486,7 @@
           <a:p>
             <a:fld id="{A0383A68-D563-4FD5-B11F-54F8D5F1E37F}" type="datetime1">
               <a:rPr lang="en-US" smtClean="0"/>
-              <a:t>4/13/26</a:t>
+              <a:t>4/20/26</a:t>
             </a:fld>
             <a:endParaRPr lang="en-US"/>
           </a:p>
@@ -5782,7 +5783,7 @@
           <a:p>
             <a:fld id="{3148FABB-02FF-476F-AB37-BDD0E354E780}" type="datetime1">
               <a:rPr lang="en-US" smtClean="0"/>
-              <a:t>4/13/26</a:t>
+              <a:t>4/20/26</a:t>
             </a:fld>
             <a:endParaRPr lang="en-US"/>
           </a:p>
@@ -6140,7 +6141,7 @@
           <a:p>
             <a:fld id="{E38EAEAF-D16E-446F-97F9-D23FB245CB45}" type="datetime1">
               <a:rPr lang="en-US" smtClean="0"/>
-              <a:t>4/13/26</a:t>
+              <a:t>4/20/26</a:t>
             </a:fld>
             <a:endParaRPr lang="en-US"/>
           </a:p>
@@ -6398,7 +6399,7 @@
           <a:p>
             <a:fld id="{BCA428D3-736A-4038-886C-8BF662AA2745}" type="datetime1">
               <a:rPr lang="en-US" smtClean="0"/>
-              <a:t>4/13/26</a:t>
+              <a:t>4/20/26</a:t>
             </a:fld>
             <a:endParaRPr lang="en-US"/>
           </a:p>
@@ -6662,7 +6663,7 @@
           <a:p>
             <a:fld id="{1ED1DDEB-9B85-4E99-8A3D-ABE66C6280C3}" type="datetime1">
               <a:rPr lang="en-US" smtClean="0"/>
-              <a:t>4/13/26</a:t>
+              <a:t>4/20/26</a:t>
             </a:fld>
             <a:endParaRPr lang="en-US"/>
           </a:p>
@@ -6926,7 +6927,7 @@
           <a:p>
             <a:fld id="{A7A65DCA-443F-4667-9ED1-418507CE45A8}" type="datetime1">
               <a:rPr lang="en-US" smtClean="0"/>
-              <a:t>4/13/26</a:t>
+              <a:t>4/20/26</a:t>
             </a:fld>
             <a:endParaRPr lang="en-US"/>
           </a:p>
@@ -7146,7 +7147,7 @@
           <a:p>
             <a:fld id="{8CA1557D-4816-44D0-B6EE-6CAC6E30B54D}" type="datetime1">
               <a:rPr lang="en-US" smtClean="0"/>
-              <a:t>4/13/26</a:t>
+              <a:t>4/20/26</a:t>
             </a:fld>
             <a:endParaRPr lang="en-US"/>
           </a:p>
@@ -7362,7 +7363,7 @@
           <a:p>
             <a:fld id="{651F872E-5ED2-46B0-83A4-0C1AF0E0D91C}" type="datetime1">
               <a:rPr lang="en-US" smtClean="0"/>
-              <a:t>4/13/26</a:t>
+              <a:t>4/20/26</a:t>
             </a:fld>
             <a:endParaRPr lang="en-US"/>
           </a:p>
@@ -7633,7 +7634,7 @@
           <a:p>
             <a:fld id="{C6218575-0C6E-47B4-936E-32183810D7BF}" type="datetime1">
               <a:rPr lang="en-US" smtClean="0"/>
-              <a:t>4/13/26</a:t>
+              <a:t>4/20/26</a:t>
             </a:fld>
             <a:endParaRPr lang="en-US"/>
           </a:p>
@@ -7782,7 +7783,7 @@
           <a:p>
             <a:fld id="{91C29FB5-1C86-423F-AEAA-2683840666C3}" type="datetime1">
               <a:rPr lang="en-US" smtClean="0"/>
-              <a:t>4/13/26</a:t>
+              <a:t>4/20/26</a:t>
             </a:fld>
             <a:endParaRPr lang="en-US"/>
           </a:p>
@@ -8032,7 +8033,7 @@
           <a:p>
             <a:fld id="{111CCB4E-88AF-46AC-B7C5-30308F179659}" type="datetime1">
               <a:rPr lang="en-US" smtClean="0"/>
-              <a:t>4/13/26</a:t>
+              <a:t>4/20/26</a:t>
             </a:fld>
             <a:endParaRPr lang="en-US"/>
           </a:p>
@@ -8282,7 +8283,7 @@
           <a:p>
             <a:fld id="{5BA915B6-CC2A-4462-A7E5-B3080DF8F97D}" type="datetime1">
               <a:rPr lang="en-US" smtClean="0"/>
-              <a:t>4/13/26</a:t>
+              <a:t>4/20/26</a:t>
             </a:fld>
             <a:endParaRPr lang="en-US"/>
           </a:p>
@@ -8597,7 +8598,7 @@
           <a:p>
             <a:fld id="{506188F7-A494-4EEB-A53D-2B97B1D4CD3C}" type="datetime1">
               <a:rPr lang="en-US" smtClean="0"/>
-              <a:t>4/13/26</a:t>
+              <a:t>4/20/26</a:t>
             </a:fld>
             <a:endParaRPr lang="en-US"/>
           </a:p>
@@ -8846,7 +8847,7 @@
           <a:p>
             <a:fld id="{782E7A21-5BA8-4C4C-9705-3A1EA342AD8A}" type="datetime1">
               <a:rPr lang="en-US" smtClean="0"/>
-              <a:t>4/13/26</a:t>
+              <a:t>4/20/26</a:t>
             </a:fld>
             <a:endParaRPr lang="en-US"/>
           </a:p>
@@ -9127,7 +9128,7 @@
           <a:p>
             <a:fld id="{9F406BC0-1562-42E5-89A2-925CA193C8A6}" type="datetime1">
               <a:rPr lang="en-US" smtClean="0"/>
-              <a:t>4/13/26</a:t>
+              <a:t>4/20/26</a:t>
             </a:fld>
             <a:endParaRPr lang="en-US"/>
           </a:p>
@@ -9341,7 +9342,7 @@
           <a:p>
             <a:fld id="{507F376A-778D-45CF-8340-DB03B2DA6A3E}" type="datetime1">
               <a:rPr lang="en-US" smtClean="0"/>
-              <a:t>4/13/26</a:t>
+              <a:t>4/20/26</a:t>
             </a:fld>
             <a:endParaRPr lang="en-US"/>
           </a:p>
@@ -9614,7 +9615,7 @@
           <a:p>
             <a:fld id="{8B9DFF5A-622E-43FE-9EE9-BAAB78AB2046}" type="datetime1">
               <a:rPr lang="en-US" smtClean="0"/>
-              <a:t>4/13/26</a:t>
+              <a:t>4/20/26</a:t>
             </a:fld>
             <a:endParaRPr lang="en-US"/>
           </a:p>
@@ -10039,7 +10040,7 @@
           <a:p>
             <a:fld id="{FF55C09E-FF30-4AA0-A227-171955622259}" type="datetime1">
               <a:rPr lang="en-US" smtClean="0"/>
-              <a:t>4/13/26</a:t>
+              <a:t>4/20/26</a:t>
             </a:fld>
             <a:endParaRPr lang="en-US"/>
           </a:p>
@@ -10183,7 +10184,7 @@
           <a:p>
             <a:fld id="{97B279FF-407B-4B41-9E69-DE66ED04A328}" type="datetime1">
               <a:rPr lang="en-US" smtClean="0"/>
-              <a:t>4/13/26</a:t>
+              <a:t>4/20/26</a:t>
             </a:fld>
             <a:endParaRPr lang="en-US"/>
           </a:p>
@@ -10299,7 +10300,7 @@
           <a:p>
             <a:fld id="{A803E812-757D-4139-AF81-227C72D4B544}" type="datetime1">
               <a:rPr lang="en-US" smtClean="0"/>
-              <a:t>4/13/26</a:t>
+              <a:t>4/20/26</a:t>
             </a:fld>
             <a:endParaRPr lang="en-US"/>
           </a:p>
@@ -10607,7 +10608,7 @@
           <a:p>
             <a:fld id="{07D6A7E1-C424-43A5-938A-12DEC0A1D59D}" type="datetime1">
               <a:rPr lang="en-US" smtClean="0"/>
-              <a:t>4/13/26</a:t>
+              <a:t>4/20/26</a:t>
             </a:fld>
             <a:endParaRPr lang="en-US"/>
           </a:p>
@@ -10914,7 +10915,7 @@
           <a:p>
             <a:fld id="{807C4FC2-B89B-4919-A96B-662A3584681C}" type="datetime1">
               <a:rPr lang="en-US" smtClean="0"/>
-              <a:t>4/13/26</a:t>
+              <a:t>4/20/26</a:t>
             </a:fld>
             <a:endParaRPr lang="en-US"/>
           </a:p>
@@ -11157,7 +11158,7 @@
           <a:p>
             <a:fld id="{7C24BE51-D660-433D-AABA-154BE028E64E}" type="datetime1">
               <a:rPr lang="en-US" smtClean="0"/>
-              <a:t>4/13/26</a:t>
+              <a:t>4/20/26</a:t>
             </a:fld>
             <a:endParaRPr lang="en-US"/>
           </a:p>
@@ -11402,7 +11403,7 @@
           <a:p>
             <a:fld id="{DB61F76E-6064-4431-B5C4-29A511725BCF}" type="datetime1">
               <a:rPr lang="en-US" smtClean="0"/>
-              <a:t>4/13/26</a:t>
+              <a:t>4/20/26</a:t>
             </a:fld>
             <a:endParaRPr lang="en-US"/>
           </a:p>
@@ -11599,7 +11600,7 @@
           <a:p>
             <a:fld id="{1CBE73BE-5F1F-40EF-8F67-E3F24D65884D}" type="datetime1">
               <a:rPr lang="en-US" smtClean="0"/>
-              <a:t>4/13/26</a:t>
+              <a:t>4/20/26</a:t>
             </a:fld>
             <a:endParaRPr lang="en-US"/>
           </a:p>
@@ -11796,7 +11797,7 @@
           <a:p>
             <a:fld id="{3C868EF1-668D-4AD0-8652-1F3B3622EDC2}" type="datetime1">
               <a:rPr lang="en-US" smtClean="0"/>
-              <a:t>4/13/26</a:t>
+              <a:t>4/20/26</a:t>
             </a:fld>
             <a:endParaRPr lang="en-US"/>
           </a:p>
@@ -12023,7 +12024,7 @@
           <a:p>
             <a:fld id="{1E95609F-9B5B-4E29-8DB1-457A85E01A27}" type="datetime1">
               <a:rPr lang="en-US" smtClean="0"/>
-              <a:t>4/13/26</a:t>
+              <a:t>4/20/26</a:t>
             </a:fld>
             <a:endParaRPr lang="en-US"/>
           </a:p>
@@ -12184,7 +12185,7 @@
           <a:p>
             <a:fld id="{16A0DE37-B9D6-425C-B79B-6C6DFFBD0DA2}" type="datetime1">
               <a:rPr lang="en-US" smtClean="0"/>
-              <a:t>4/13/26</a:t>
+              <a:t>4/20/26</a:t>
             </a:fld>
             <a:endParaRPr lang="en-US"/>
           </a:p>
@@ -12429,7 +12430,7 @@
           <a:p>
             <a:fld id="{1045B0EE-4023-4E3C-8875-10AA631453CF}" type="datetime1">
               <a:rPr lang="en-US" smtClean="0"/>
-              <a:t>4/13/26</a:t>
+              <a:t>4/20/26</a:t>
             </a:fld>
             <a:endParaRPr lang="en-US"/>
           </a:p>
@@ -12671,7 +12672,7 @@
           <a:p>
             <a:fld id="{5EE9E671-1C83-40F7-9D33-FE8AAC7F721F}" type="datetime1">
               <a:rPr lang="en-US" smtClean="0"/>
-              <a:t>4/13/26</a:t>
+              <a:t>4/20/26</a:t>
             </a:fld>
             <a:endParaRPr lang="en-US"/>
           </a:p>
@@ -18047,7 +18048,7 @@
           <p:cNvPr id="2" name="Title 1">
             <a:extLst>
               <a:ext uri="{FF2B5EF4-FFF2-40B4-BE49-F238E27FC236}">
-                <a16:creationId xmlns:a16="http://schemas.microsoft.com/office/drawing/2014/main" id="{BD61819A-2DA2-0F0A-3E6C-7A8E6DB117EF}"/>
+                <a16:creationId xmlns:a16="http://schemas.microsoft.com/office/drawing/2014/main" id="{36C83C48-8DD1-A67C-C1C1-CF34B8926445}"/>
               </a:ext>
             </a:extLst>
           </p:cNvPr>
@@ -18063,7 +18064,10 @@
           <a:bodyPr/>
           <a:lstStyle/>
           <a:p>
-            <a:endParaRPr lang="en-US"/>
+            <a:r>
+              <a:rPr lang="en-US"/>
+              <a:t>Sample lambda code</a:t>
+            </a:r>
           </a:p>
         </p:txBody>
       </p:sp>
@@ -18072,7 +18076,7 @@
           <p:cNvPr id="3" name="Content Placeholder 2">
             <a:extLst>
               <a:ext uri="{FF2B5EF4-FFF2-40B4-BE49-F238E27FC236}">
-                <a16:creationId xmlns:a16="http://schemas.microsoft.com/office/drawing/2014/main" id="{EFEC71A4-D747-5068-0D14-7EF6FE9A16BF}"/>
+                <a16:creationId xmlns:a16="http://schemas.microsoft.com/office/drawing/2014/main" id="{B785AA79-7C7C-8A41-3F32-D5A135FAC8CC}"/>
               </a:ext>
             </a:extLst>
           </p:cNvPr>
@@ -18085,78 +18089,201 @@
         </p:nvSpPr>
         <p:spPr/>
         <p:txBody>
-          <a:bodyPr/>
-          <a:lstStyle/>
-          <a:p>
-            <a:r>
-              <a:rPr lang="en-IN" b="1" dirty="0"/>
-              <a:t>Flow</a:t>
-            </a:r>
-          </a:p>
-          <a:p>
-            <a:r>
-              <a:rPr lang="en-IN" dirty="0"/>
-              <a:t>New parquet file uploaded</a:t>
-            </a:r>
-            <a:br>
-              <a:rPr lang="en-IN" dirty="0"/>
-            </a:br>
-            <a:r>
-              <a:rPr lang="en-IN" dirty="0"/>
-              <a:t>        ↓</a:t>
-            </a:r>
-            <a:br>
-              <a:rPr lang="en-IN" dirty="0"/>
-            </a:br>
-            <a:r>
-              <a:rPr lang="en-IN" dirty="0"/>
-              <a:t>S3 event generated</a:t>
-            </a:r>
-            <a:br>
-              <a:rPr lang="en-IN" dirty="0"/>
-            </a:br>
-            <a:r>
-              <a:rPr lang="en-IN" dirty="0"/>
-              <a:t>        ↓</a:t>
-            </a:r>
-            <a:br>
-              <a:rPr lang="en-IN" dirty="0"/>
-            </a:br>
-            <a:r>
-              <a:rPr lang="en-IN" dirty="0"/>
-              <a:t>Lambda triggered</a:t>
-            </a:r>
-            <a:br>
-              <a:rPr lang="en-IN" dirty="0"/>
-            </a:br>
-            <a:r>
-              <a:rPr lang="en-IN" dirty="0"/>
-              <a:t>        ↓</a:t>
-            </a:r>
-            <a:br>
-              <a:rPr lang="en-IN" dirty="0"/>
-            </a:br>
-            <a:r>
-              <a:rPr lang="en-IN" dirty="0"/>
-              <a:t>Glue crawler started</a:t>
-            </a:r>
-          </a:p>
-          <a:p>
-            <a:r>
-              <a:rPr lang="en-IN" b="1" dirty="0"/>
-              <a:t>🧠 Key concept</a:t>
-            </a:r>
-          </a:p>
-          <a:p>
-            <a:r>
-              <a:rPr lang="en-IN" dirty="0"/>
-              <a:t>Lambda = works as a connection between services (event-driven compute)</a:t>
-            </a:r>
-          </a:p>
+          <a:bodyPr>
+            <a:normAutofit fontScale="62500" lnSpcReduction="20000"/>
+          </a:bodyPr>
+          <a:lstStyle/>
           <a:p>
             <a:pPr marL="0" indent="0">
               <a:buNone/>
             </a:pPr>
+            <a:r>
+              <a:rPr lang="en-US" dirty="0"/>
+              <a:t>import boto3</a:t>
+            </a:r>
+          </a:p>
+          <a:p>
+            <a:pPr marL="0" indent="0">
+              <a:buNone/>
+            </a:pPr>
+            <a:r>
+              <a:rPr lang="en-US" dirty="0"/>
+              <a:t>glue = boto3.client('glue')</a:t>
+            </a:r>
+          </a:p>
+          <a:p>
+            <a:pPr marL="0" indent="0">
+              <a:buNone/>
+            </a:pPr>
+            <a:r>
+              <a:rPr lang="en-US" dirty="0"/>
+              <a:t>def </a:t>
+            </a:r>
+            <a:r>
+              <a:rPr lang="en-US" dirty="0" err="1"/>
+              <a:t>call_glue_crawler</a:t>
+            </a:r>
+            <a:r>
+              <a:rPr lang="en-US" dirty="0"/>
+              <a:t>(event, context):</a:t>
+            </a:r>
+          </a:p>
+          <a:p>
+            <a:pPr marL="0" indent="0">
+              <a:buNone/>
+            </a:pPr>
+            <a:r>
+              <a:rPr lang="en-US" dirty="0"/>
+              <a:t>    </a:t>
+            </a:r>
+            <a:r>
+              <a:rPr lang="en-US" dirty="0" err="1"/>
+              <a:t>crawler_name</a:t>
+            </a:r>
+            <a:r>
+              <a:rPr lang="en-US" dirty="0"/>
+              <a:t> = "s3-processed-crawler"</a:t>
+            </a:r>
+          </a:p>
+          <a:p>
+            <a:pPr marL="0" indent="0">
+              <a:buNone/>
+            </a:pPr>
+            <a:r>
+              <a:rPr lang="en-US" dirty="0"/>
+              <a:t>    try:</a:t>
+            </a:r>
+          </a:p>
+          <a:p>
+            <a:pPr marL="0" indent="0">
+              <a:buNone/>
+            </a:pPr>
+            <a:r>
+              <a:rPr lang="en-US" dirty="0"/>
+              <a:t>        status = </a:t>
+            </a:r>
+            <a:r>
+              <a:rPr lang="en-US" dirty="0" err="1"/>
+              <a:t>glue.get_crawler</a:t>
+            </a:r>
+            <a:r>
+              <a:rPr lang="en-US" dirty="0"/>
+              <a:t>(Name=</a:t>
+            </a:r>
+            <a:r>
+              <a:rPr lang="en-US" dirty="0" err="1"/>
+              <a:t>crawler_name</a:t>
+            </a:r>
+            <a:r>
+              <a:rPr lang="en-US" dirty="0"/>
+              <a:t>)['Crawler']['State']</a:t>
+            </a:r>
+          </a:p>
+          <a:p>
+            <a:pPr marL="0" indent="0">
+              <a:buNone/>
+            </a:pPr>
+            <a:r>
+              <a:rPr lang="en-US" dirty="0"/>
+              <a:t>        if status == 'READY':</a:t>
+            </a:r>
+          </a:p>
+          <a:p>
+            <a:pPr marL="0" indent="0">
+              <a:buNone/>
+            </a:pPr>
+            <a:r>
+              <a:rPr lang="en-US" dirty="0"/>
+              <a:t>            </a:t>
+            </a:r>
+            <a:r>
+              <a:rPr lang="en-US" dirty="0" err="1"/>
+              <a:t>glue.start_crawler</a:t>
+            </a:r>
+            <a:r>
+              <a:rPr lang="en-US" dirty="0"/>
+              <a:t>(Name=</a:t>
+            </a:r>
+            <a:r>
+              <a:rPr lang="en-US" dirty="0" err="1"/>
+              <a:t>crawler_name</a:t>
+            </a:r>
+            <a:r>
+              <a:rPr lang="en-US" dirty="0"/>
+              <a:t>)</a:t>
+            </a:r>
+          </a:p>
+          <a:p>
+            <a:pPr marL="0" indent="0">
+              <a:buNone/>
+            </a:pPr>
+            <a:r>
+              <a:rPr lang="en-US" dirty="0"/>
+              <a:t>            print("Crawler started")</a:t>
+            </a:r>
+          </a:p>
+          <a:p>
+            <a:pPr marL="0" indent="0">
+              <a:buNone/>
+            </a:pPr>
+            <a:r>
+              <a:rPr lang="en-US" dirty="0"/>
+              <a:t>        else:</a:t>
+            </a:r>
+          </a:p>
+          <a:p>
+            <a:pPr marL="0" indent="0">
+              <a:buNone/>
+            </a:pPr>
+            <a:r>
+              <a:rPr lang="en-US" dirty="0"/>
+              <a:t>            print("Crawler already running")</a:t>
+            </a:r>
+          </a:p>
+          <a:p>
+            <a:pPr marL="0" indent="0">
+              <a:buNone/>
+            </a:pPr>
+            <a:r>
+              <a:rPr lang="en-US" dirty="0"/>
+              <a:t>    except Exception as e:</a:t>
+            </a:r>
+          </a:p>
+          <a:p>
+            <a:pPr marL="0" indent="0">
+              <a:buNone/>
+            </a:pPr>
+            <a:r>
+              <a:rPr lang="en-US" dirty="0"/>
+              <a:t>        print(</a:t>
+            </a:r>
+            <a:r>
+              <a:rPr lang="en-US" dirty="0" err="1"/>
+              <a:t>f"Error</a:t>
+            </a:r>
+            <a:r>
+              <a:rPr lang="en-US" dirty="0"/>
+              <a:t>: {str(e)}")</a:t>
+            </a:r>
+          </a:p>
+          <a:p>
+            <a:pPr marL="0" indent="0">
+              <a:buNone/>
+            </a:pPr>
+            <a:r>
+              <a:rPr lang="en-US" dirty="0"/>
+              <a:t>    return {"</a:t>
+            </a:r>
+            <a:r>
+              <a:rPr lang="en-US" dirty="0" err="1"/>
+              <a:t>statusCode</a:t>
+            </a:r>
+            <a:r>
+              <a:rPr lang="en-US" dirty="0"/>
+              <a:t>": 200}</a:t>
+            </a:r>
+          </a:p>
+          <a:p>
             <a:endParaRPr lang="en-US" dirty="0"/>
           </a:p>
         </p:txBody>
@@ -18164,7 +18291,7 @@
     </p:spTree>
     <p:extLst>
       <p:ext uri="{BB962C8B-B14F-4D97-AF65-F5344CB8AC3E}">
-        <p14:creationId xmlns:p14="http://schemas.microsoft.com/office/powerpoint/2010/main" val="2166646744"/>
+        <p14:creationId xmlns:p14="http://schemas.microsoft.com/office/powerpoint/2010/main" val="3395796455"/>
       </p:ext>
     </p:extLst>
   </p:cSld>
@@ -18196,6 +18323,155 @@
           <p:cNvPr id="2" name="Title 1">
             <a:extLst>
               <a:ext uri="{FF2B5EF4-FFF2-40B4-BE49-F238E27FC236}">
+                <a16:creationId xmlns:a16="http://schemas.microsoft.com/office/drawing/2014/main" id="{BD61819A-2DA2-0F0A-3E6C-7A8E6DB117EF}"/>
+              </a:ext>
+            </a:extLst>
+          </p:cNvPr>
+          <p:cNvSpPr>
+            <a:spLocks noGrp="1"/>
+          </p:cNvSpPr>
+          <p:nvPr>
+            <p:ph type="title"/>
+          </p:nvPr>
+        </p:nvSpPr>
+        <p:spPr/>
+        <p:txBody>
+          <a:bodyPr/>
+          <a:lstStyle/>
+          <a:p>
+            <a:endParaRPr lang="en-US"/>
+          </a:p>
+        </p:txBody>
+      </p:sp>
+      <p:sp>
+        <p:nvSpPr>
+          <p:cNvPr id="3" name="Content Placeholder 2">
+            <a:extLst>
+              <a:ext uri="{FF2B5EF4-FFF2-40B4-BE49-F238E27FC236}">
+                <a16:creationId xmlns:a16="http://schemas.microsoft.com/office/drawing/2014/main" id="{EFEC71A4-D747-5068-0D14-7EF6FE9A16BF}"/>
+              </a:ext>
+            </a:extLst>
+          </p:cNvPr>
+          <p:cNvSpPr>
+            <a:spLocks noGrp="1"/>
+          </p:cNvSpPr>
+          <p:nvPr>
+            <p:ph idx="1"/>
+          </p:nvPr>
+        </p:nvSpPr>
+        <p:spPr/>
+        <p:txBody>
+          <a:bodyPr/>
+          <a:lstStyle/>
+          <a:p>
+            <a:r>
+              <a:rPr lang="en-IN" b="1" dirty="0"/>
+              <a:t>Flow</a:t>
+            </a:r>
+          </a:p>
+          <a:p>
+            <a:r>
+              <a:rPr lang="en-IN" dirty="0"/>
+              <a:t>New parquet file uploaded</a:t>
+            </a:r>
+            <a:br>
+              <a:rPr lang="en-IN" dirty="0"/>
+            </a:br>
+            <a:r>
+              <a:rPr lang="en-IN" dirty="0"/>
+              <a:t>        ↓</a:t>
+            </a:r>
+            <a:br>
+              <a:rPr lang="en-IN" dirty="0"/>
+            </a:br>
+            <a:r>
+              <a:rPr lang="en-IN" dirty="0"/>
+              <a:t>S3 event generated</a:t>
+            </a:r>
+            <a:br>
+              <a:rPr lang="en-IN" dirty="0"/>
+            </a:br>
+            <a:r>
+              <a:rPr lang="en-IN" dirty="0"/>
+              <a:t>        ↓</a:t>
+            </a:r>
+            <a:br>
+              <a:rPr lang="en-IN" dirty="0"/>
+            </a:br>
+            <a:r>
+              <a:rPr lang="en-IN" dirty="0"/>
+              <a:t>Lambda triggered</a:t>
+            </a:r>
+            <a:br>
+              <a:rPr lang="en-IN" dirty="0"/>
+            </a:br>
+            <a:r>
+              <a:rPr lang="en-IN" dirty="0"/>
+              <a:t>        ↓</a:t>
+            </a:r>
+            <a:br>
+              <a:rPr lang="en-IN" dirty="0"/>
+            </a:br>
+            <a:r>
+              <a:rPr lang="en-IN" dirty="0"/>
+              <a:t>Glue crawler started</a:t>
+            </a:r>
+          </a:p>
+          <a:p>
+            <a:r>
+              <a:rPr lang="en-IN" b="1" dirty="0"/>
+              <a:t>🧠 Key concept</a:t>
+            </a:r>
+          </a:p>
+          <a:p>
+            <a:r>
+              <a:rPr lang="en-IN" dirty="0"/>
+              <a:t>Lambda = works as a connection between services (event-driven compute)</a:t>
+            </a:r>
+          </a:p>
+          <a:p>
+            <a:pPr marL="0" indent="0">
+              <a:buNone/>
+            </a:pPr>
+            <a:endParaRPr lang="en-US" dirty="0"/>
+          </a:p>
+        </p:txBody>
+      </p:sp>
+    </p:spTree>
+    <p:extLst>
+      <p:ext uri="{BB962C8B-B14F-4D97-AF65-F5344CB8AC3E}">
+        <p14:creationId xmlns:p14="http://schemas.microsoft.com/office/powerpoint/2010/main" val="2166646744"/>
+      </p:ext>
+    </p:extLst>
+  </p:cSld>
+  <p:clrMapOvr>
+    <a:masterClrMapping/>
+  </p:clrMapOvr>
+</p:sld>
+</file>
+
+<file path=ppt/slides/slide38.xml><?xml version="1.0" encoding="utf-8"?>
+<p:sld xmlns:a="http://schemas.openxmlformats.org/drawingml/2006/main" xmlns:r="http://schemas.openxmlformats.org/officeDocument/2006/relationships" xmlns:p="http://schemas.openxmlformats.org/presentationml/2006/main">
+  <p:cSld>
+    <p:spTree>
+      <p:nvGrpSpPr>
+        <p:cNvPr id="1" name=""/>
+        <p:cNvGrpSpPr/>
+        <p:nvPr/>
+      </p:nvGrpSpPr>
+      <p:grpSpPr>
+        <a:xfrm>
+          <a:off x="0" y="0"/>
+          <a:ext cx="0" cy="0"/>
+          <a:chOff x="0" y="0"/>
+          <a:chExt cx="0" cy="0"/>
+        </a:xfrm>
+      </p:grpSpPr>
+      <p:sp>
+        <p:nvSpPr>
+          <p:cNvPr id="2" name="Title 1">
+            <a:extLst>
+              <a:ext uri="{FF2B5EF4-FFF2-40B4-BE49-F238E27FC236}">
                 <a16:creationId xmlns:a16="http://schemas.microsoft.com/office/drawing/2014/main" id="{9DDDD394-8B7D-D5A0-B89E-18594DD540B0}"/>
               </a:ext>
             </a:extLst>
@@ -18381,7 +18657,7 @@
 </p:sld>
 </file>
 
-<file path=ppt/slides/slide38.xml><?xml version="1.0" encoding="utf-8"?>
+<file path=ppt/slides/slide39.xml><?xml version="1.0" encoding="utf-8"?>
 <p:sld xmlns:a="http://schemas.openxmlformats.org/drawingml/2006/main" xmlns:r="http://schemas.openxmlformats.org/officeDocument/2006/relationships" xmlns:p="http://schemas.openxmlformats.org/presentationml/2006/main">
   <p:cSld>
     <p:spTree>
